--- a/Reporting/Claude Presents/Deck3_Servicing/Coal_Water_and_Servicing_Explained.pptx
+++ b/Reporting/Claude Presents/Deck3_Servicing/Coal_Water_and_Servicing_Explained.pptx
@@ -3285,6 +3285,174 @@
   <p:clrMapOvr>
     <a:masterClrMapping/>
   </p:clrMapOvr>
+  <mc:AlternateContent xmlns:mc="http://schemas.openxmlformats.org/markup-compatibility/2006">
+    <mc:Choice xmlns:p14="http://schemas.microsoft.com/office/powerpoint/2010/main" Requires="p14">
+      <p:transition spd="med" p14:dur="700">
+        <p:fade/>
+      </p:transition>
+    </mc:Choice>
+    <mc:Fallback>
+      <p:transition spd="med">
+        <p:fade/>
+      </p:transition>
+    </mc:Fallback>
+  </mc:AlternateContent>
+  <p:timing>
+    <p:tnLst>
+      <p:par>
+        <p:cTn id="1" dur="indefinite" restart="never" nodeType="tmRoot">
+          <p:childTnLst>
+            <p:seq concurrent="1" nextAc="seek">
+              <p:cTn id="2" dur="indefinite" nodeType="mainSeq">
+                <p:childTnLst>
+                  <p:par>
+                    <p:cTn id="3" fill="hold">
+                      <p:stCondLst>
+                        <p:cond delay="indefinite"/>
+                        <p:cond evt="onBegin" delay="0">
+                          <p:tn val="2"/>
+                        </p:cond>
+                      </p:stCondLst>
+                      <p:childTnLst>
+                        <p:par>
+                          <p:cTn id="4" fill="hold">
+                            <p:stCondLst>
+                              <p:cond delay="0"/>
+                            </p:stCondLst>
+                            <p:childTnLst>
+                              <p:par>
+                                <p:cTn id="5" presetID="10" presetClass="entr" presetSubtype="0" fill="hold" nodeType="afterEffect">
+                                  <p:stCondLst>
+                                    <p:cond delay="0"/>
+                                  </p:stCondLst>
+                                  <p:childTnLst>
+                                    <p:set>
+                                      <p:cBhvr>
+                                        <p:cTn id="6" dur="1" fill="hold">
+                                          <p:stCondLst>
+                                            <p:cond delay="0"/>
+                                          </p:stCondLst>
+                                        </p:cTn>
+                                        <p:tgtEl>
+                                          <p:spTgt spid="3"/>
+                                        </p:tgtEl>
+                                        <p:attrNameLst>
+                                          <p:attrName>style.visibility</p:attrName>
+                                        </p:attrNameLst>
+                                      </p:cBhvr>
+                                      <p:to>
+                                        <p:strVal val="visible"/>
+                                      </p:to>
+                                    </p:set>
+                                    <p:animEffect transition="in" filter="fade">
+                                      <p:cBhvr>
+                                        <p:cTn id="7" dur="500"/>
+                                        <p:tgtEl>
+                                          <p:spTgt spid="3"/>
+                                        </p:tgtEl>
+                                      </p:cBhvr>
+                                    </p:animEffect>
+                                  </p:childTnLst>
+                                </p:cTn>
+                              </p:par>
+                              <p:par>
+                                <p:cTn id="8" presetID="10" presetClass="entr" presetSubtype="0" fill="hold" nodeType="withEffect">
+                                  <p:stCondLst>
+                                    <p:cond delay="300"/>
+                                  </p:stCondLst>
+                                  <p:childTnLst>
+                                    <p:set>
+                                      <p:cBhvr>
+                                        <p:cTn id="9" dur="1" fill="hold">
+                                          <p:stCondLst>
+                                            <p:cond delay="0"/>
+                                          </p:stCondLst>
+                                        </p:cTn>
+                                        <p:tgtEl>
+                                          <p:spTgt spid="5"/>
+                                        </p:tgtEl>
+                                        <p:attrNameLst>
+                                          <p:attrName>style.visibility</p:attrName>
+                                        </p:attrNameLst>
+                                      </p:cBhvr>
+                                      <p:to>
+                                        <p:strVal val="visible"/>
+                                      </p:to>
+                                    </p:set>
+                                    <p:animEffect transition="in" filter="fade">
+                                      <p:cBhvr>
+                                        <p:cTn id="10" dur="500"/>
+                                        <p:tgtEl>
+                                          <p:spTgt spid="5"/>
+                                        </p:tgtEl>
+                                      </p:cBhvr>
+                                    </p:animEffect>
+                                  </p:childTnLst>
+                                </p:cTn>
+                              </p:par>
+                              <p:par>
+                                <p:cTn id="11" presetID="10" presetClass="entr" presetSubtype="0" fill="hold" nodeType="withEffect">
+                                  <p:stCondLst>
+                                    <p:cond delay="600"/>
+                                  </p:stCondLst>
+                                  <p:childTnLst>
+                                    <p:set>
+                                      <p:cBhvr>
+                                        <p:cTn id="12" dur="1" fill="hold">
+                                          <p:stCondLst>
+                                            <p:cond delay="0"/>
+                                          </p:stCondLst>
+                                        </p:cTn>
+                                        <p:tgtEl>
+                                          <p:spTgt spid="6"/>
+                                        </p:tgtEl>
+                                        <p:attrNameLst>
+                                          <p:attrName>style.visibility</p:attrName>
+                                        </p:attrNameLst>
+                                      </p:cBhvr>
+                                      <p:to>
+                                        <p:strVal val="visible"/>
+                                      </p:to>
+                                    </p:set>
+                                    <p:animEffect transition="in" filter="fade">
+                                      <p:cBhvr>
+                                        <p:cTn id="13" dur="500"/>
+                                        <p:tgtEl>
+                                          <p:spTgt spid="6"/>
+                                        </p:tgtEl>
+                                      </p:cBhvr>
+                                    </p:animEffect>
+                                  </p:childTnLst>
+                                </p:cTn>
+                              </p:par>
+                            </p:childTnLst>
+                          </p:cTn>
+                        </p:par>
+                      </p:childTnLst>
+                    </p:cTn>
+                  </p:par>
+                </p:childTnLst>
+              </p:cTn>
+              <p:prevCondLst>
+                <p:cond evt="onPrev" delay="0">
+                  <p:tgtEl>
+                    <p:sldTgt/>
+                  </p:tgtEl>
+                </p:cond>
+              </p:prevCondLst>
+              <p:nextCondLst>
+                <p:cond evt="onNext" delay="0">
+                  <p:tgtEl>
+                    <p:sldTgt/>
+                  </p:tgtEl>
+                </p:cond>
+              </p:nextCondLst>
+            </p:seq>
+          </p:childTnLst>
+        </p:cTn>
+      </p:par>
+    </p:tnLst>
+  </p:timing>
 </p:sld>
 </file>
 
@@ -4259,6 +4427,279 @@
   <p:clrMapOvr>
     <a:masterClrMapping/>
   </p:clrMapOvr>
+  <mc:AlternateContent xmlns:mc="http://schemas.openxmlformats.org/markup-compatibility/2006">
+    <mc:Choice xmlns:p14="http://schemas.microsoft.com/office/powerpoint/2010/main" Requires="p14">
+      <p:transition spd="med" p14:dur="700">
+        <p:fade/>
+      </p:transition>
+    </mc:Choice>
+    <mc:Fallback>
+      <p:transition spd="med">
+        <p:fade/>
+      </p:transition>
+    </mc:Fallback>
+  </mc:AlternateContent>
+  <p:timing>
+    <p:tnLst>
+      <p:par>
+        <p:cTn id="1" dur="indefinite" restart="never" nodeType="tmRoot">
+          <p:childTnLst>
+            <p:seq concurrent="1" nextAc="seek">
+              <p:cTn id="2" dur="indefinite" nodeType="mainSeq">
+                <p:childTnLst>
+                  <p:par>
+                    <p:cTn id="3" fill="hold">
+                      <p:stCondLst>
+                        <p:cond delay="indefinite"/>
+                        <p:cond evt="onBegin" delay="0">
+                          <p:tn val="2"/>
+                        </p:cond>
+                      </p:stCondLst>
+                      <p:childTnLst>
+                        <p:par>
+                          <p:cTn id="4" fill="hold">
+                            <p:stCondLst>
+                              <p:cond delay="0"/>
+                            </p:stCondLst>
+                            <p:childTnLst>
+                              <p:par>
+                                <p:cTn id="5" presetID="10" presetClass="entr" presetSubtype="0" fill="hold" nodeType="afterEffect">
+                                  <p:stCondLst>
+                                    <p:cond delay="0"/>
+                                  </p:stCondLst>
+                                  <p:childTnLst>
+                                    <p:set>
+                                      <p:cBhvr>
+                                        <p:cTn id="6" dur="1" fill="hold">
+                                          <p:stCondLst>
+                                            <p:cond delay="0"/>
+                                          </p:stCondLst>
+                                        </p:cTn>
+                                        <p:tgtEl>
+                                          <p:spTgt spid="4"/>
+                                        </p:tgtEl>
+                                        <p:attrNameLst>
+                                          <p:attrName>style.visibility</p:attrName>
+                                        </p:attrNameLst>
+                                      </p:cBhvr>
+                                      <p:to>
+                                        <p:strVal val="visible"/>
+                                      </p:to>
+                                    </p:set>
+                                    <p:animEffect transition="in" filter="fade">
+                                      <p:cBhvr>
+                                        <p:cTn id="7" dur="500"/>
+                                        <p:tgtEl>
+                                          <p:spTgt spid="4"/>
+                                        </p:tgtEl>
+                                      </p:cBhvr>
+                                    </p:animEffect>
+                                  </p:childTnLst>
+                                </p:cTn>
+                              </p:par>
+                              <p:par>
+                                <p:cTn id="8" presetID="10" presetClass="entr" presetSubtype="0" fill="hold" nodeType="withEffect">
+                                  <p:stCondLst>
+                                    <p:cond delay="300"/>
+                                  </p:stCondLst>
+                                  <p:childTnLst>
+                                    <p:set>
+                                      <p:cBhvr>
+                                        <p:cTn id="9" dur="1" fill="hold">
+                                          <p:stCondLst>
+                                            <p:cond delay="0"/>
+                                          </p:stCondLst>
+                                        </p:cTn>
+                                        <p:tgtEl>
+                                          <p:spTgt spid="5"/>
+                                        </p:tgtEl>
+                                        <p:attrNameLst>
+                                          <p:attrName>style.visibility</p:attrName>
+                                        </p:attrNameLst>
+                                      </p:cBhvr>
+                                      <p:to>
+                                        <p:strVal val="visible"/>
+                                      </p:to>
+                                    </p:set>
+                                    <p:animEffect transition="in" filter="fade">
+                                      <p:cBhvr>
+                                        <p:cTn id="10" dur="500"/>
+                                        <p:tgtEl>
+                                          <p:spTgt spid="5"/>
+                                        </p:tgtEl>
+                                      </p:cBhvr>
+                                    </p:animEffect>
+                                  </p:childTnLst>
+                                </p:cTn>
+                              </p:par>
+                              <p:par>
+                                <p:cTn id="11" presetID="10" presetClass="entr" presetSubtype="0" fill="hold" nodeType="withEffect">
+                                  <p:stCondLst>
+                                    <p:cond delay="600"/>
+                                  </p:stCondLst>
+                                  <p:childTnLst>
+                                    <p:set>
+                                      <p:cBhvr>
+                                        <p:cTn id="12" dur="1" fill="hold">
+                                          <p:stCondLst>
+                                            <p:cond delay="0"/>
+                                          </p:stCondLst>
+                                        </p:cTn>
+                                        <p:tgtEl>
+                                          <p:spTgt spid="6"/>
+                                        </p:tgtEl>
+                                        <p:attrNameLst>
+                                          <p:attrName>style.visibility</p:attrName>
+                                        </p:attrNameLst>
+                                      </p:cBhvr>
+                                      <p:to>
+                                        <p:strVal val="visible"/>
+                                      </p:to>
+                                    </p:set>
+                                    <p:animEffect transition="in" filter="fade">
+                                      <p:cBhvr>
+                                        <p:cTn id="13" dur="500"/>
+                                        <p:tgtEl>
+                                          <p:spTgt spid="6"/>
+                                        </p:tgtEl>
+                                      </p:cBhvr>
+                                    </p:animEffect>
+                                  </p:childTnLst>
+                                </p:cTn>
+                              </p:par>
+                              <p:par>
+                                <p:cTn id="14" presetID="10" presetClass="entr" presetSubtype="0" fill="hold" nodeType="withEffect">
+                                  <p:stCondLst>
+                                    <p:cond delay="900"/>
+                                  </p:stCondLst>
+                                  <p:childTnLst>
+                                    <p:set>
+                                      <p:cBhvr>
+                                        <p:cTn id="15" dur="1" fill="hold">
+                                          <p:stCondLst>
+                                            <p:cond delay="0"/>
+                                          </p:stCondLst>
+                                        </p:cTn>
+                                        <p:tgtEl>
+                                          <p:spTgt spid="7"/>
+                                        </p:tgtEl>
+                                        <p:attrNameLst>
+                                          <p:attrName>style.visibility</p:attrName>
+                                        </p:attrNameLst>
+                                      </p:cBhvr>
+                                      <p:to>
+                                        <p:strVal val="visible"/>
+                                      </p:to>
+                                    </p:set>
+                                    <p:animEffect transition="in" filter="fade">
+                                      <p:cBhvr>
+                                        <p:cTn id="16" dur="500"/>
+                                        <p:tgtEl>
+                                          <p:spTgt spid="7"/>
+                                        </p:tgtEl>
+                                      </p:cBhvr>
+                                    </p:animEffect>
+                                  </p:childTnLst>
+                                </p:cTn>
+                              </p:par>
+                              <p:par>
+                                <p:cTn id="17" presetID="10" presetClass="entr" presetSubtype="0" fill="hold" nodeType="withEffect">
+                                  <p:stCondLst>
+                                    <p:cond delay="1200"/>
+                                  </p:stCondLst>
+                                  <p:childTnLst>
+                                    <p:set>
+                                      <p:cBhvr>
+                                        <p:cTn id="18" dur="1" fill="hold">
+                                          <p:stCondLst>
+                                            <p:cond delay="0"/>
+                                          </p:stCondLst>
+                                        </p:cTn>
+                                        <p:tgtEl>
+                                          <p:spTgt spid="8"/>
+                                        </p:tgtEl>
+                                        <p:attrNameLst>
+                                          <p:attrName>style.visibility</p:attrName>
+                                        </p:attrNameLst>
+                                      </p:cBhvr>
+                                      <p:to>
+                                        <p:strVal val="visible"/>
+                                      </p:to>
+                                    </p:set>
+                                    <p:animEffect transition="in" filter="fade">
+                                      <p:cBhvr>
+                                        <p:cTn id="19" dur="500"/>
+                                        <p:tgtEl>
+                                          <p:spTgt spid="8"/>
+                                        </p:tgtEl>
+                                      </p:cBhvr>
+                                    </p:animEffect>
+                                  </p:childTnLst>
+                                </p:cTn>
+                              </p:par>
+                              <p:par>
+                                <p:cTn id="20" presetID="10" presetClass="entr" presetSubtype="0" fill="hold" nodeType="withEffect">
+                                  <p:stCondLst>
+                                    <p:cond delay="1500"/>
+                                  </p:stCondLst>
+                                  <p:childTnLst>
+                                    <p:set>
+                                      <p:cBhvr>
+                                        <p:cTn id="21" dur="1" fill="hold">
+                                          <p:stCondLst>
+                                            <p:cond delay="0"/>
+                                          </p:stCondLst>
+                                        </p:cTn>
+                                        <p:tgtEl>
+                                          <p:spTgt spid="9"/>
+                                        </p:tgtEl>
+                                        <p:attrNameLst>
+                                          <p:attrName>style.visibility</p:attrName>
+                                        </p:attrNameLst>
+                                      </p:cBhvr>
+                                      <p:to>
+                                        <p:strVal val="visible"/>
+                                      </p:to>
+                                    </p:set>
+                                    <p:animEffect transition="in" filter="fade">
+                                      <p:cBhvr>
+                                        <p:cTn id="22" dur="500"/>
+                                        <p:tgtEl>
+                                          <p:spTgt spid="9"/>
+                                        </p:tgtEl>
+                                      </p:cBhvr>
+                                    </p:animEffect>
+                                  </p:childTnLst>
+                                </p:cTn>
+                              </p:par>
+                            </p:childTnLst>
+                          </p:cTn>
+                        </p:par>
+                      </p:childTnLst>
+                    </p:cTn>
+                  </p:par>
+                </p:childTnLst>
+              </p:cTn>
+              <p:prevCondLst>
+                <p:cond evt="onPrev" delay="0">
+                  <p:tgtEl>
+                    <p:sldTgt/>
+                  </p:tgtEl>
+                </p:cond>
+              </p:prevCondLst>
+              <p:nextCondLst>
+                <p:cond evt="onNext" delay="0">
+                  <p:tgtEl>
+                    <p:sldTgt/>
+                  </p:tgtEl>
+                </p:cond>
+              </p:nextCondLst>
+            </p:seq>
+          </p:childTnLst>
+        </p:cTn>
+      </p:par>
+    </p:tnLst>
+  </p:timing>
 </p:sld>
 </file>
 
@@ -5318,6 +5759,209 @@
   <p:clrMapOvr>
     <a:masterClrMapping/>
   </p:clrMapOvr>
+  <mc:AlternateContent xmlns:mc="http://schemas.openxmlformats.org/markup-compatibility/2006">
+    <mc:Choice xmlns:p14="http://schemas.microsoft.com/office/powerpoint/2010/main" Requires="p14">
+      <p:transition spd="med" p14:dur="700">
+        <p:fade/>
+      </p:transition>
+    </mc:Choice>
+    <mc:Fallback>
+      <p:transition spd="med">
+        <p:fade/>
+      </p:transition>
+    </mc:Fallback>
+  </mc:AlternateContent>
+  <p:timing>
+    <p:tnLst>
+      <p:par>
+        <p:cTn id="1" dur="indefinite" restart="never" nodeType="tmRoot">
+          <p:childTnLst>
+            <p:seq concurrent="1" nextAc="seek">
+              <p:cTn id="2" dur="indefinite" nodeType="mainSeq">
+                <p:childTnLst>
+                  <p:par>
+                    <p:cTn id="3" fill="hold">
+                      <p:stCondLst>
+                        <p:cond delay="indefinite"/>
+                        <p:cond evt="onBegin" delay="0">
+                          <p:tn val="2"/>
+                        </p:cond>
+                      </p:stCondLst>
+                      <p:childTnLst>
+                        <p:par>
+                          <p:cTn id="4" fill="hold">
+                            <p:stCondLst>
+                              <p:cond delay="0"/>
+                            </p:stCondLst>
+                            <p:childTnLst>
+                              <p:par>
+                                <p:cTn id="5" presetID="10" presetClass="entr" presetSubtype="0" fill="hold" nodeType="afterEffect">
+                                  <p:stCondLst>
+                                    <p:cond delay="0"/>
+                                  </p:stCondLst>
+                                  <p:childTnLst>
+                                    <p:set>
+                                      <p:cBhvr>
+                                        <p:cTn id="6" dur="1" fill="hold">
+                                          <p:stCondLst>
+                                            <p:cond delay="0"/>
+                                          </p:stCondLst>
+                                        </p:cTn>
+                                        <p:tgtEl>
+                                          <p:spTgt spid="4"/>
+                                        </p:tgtEl>
+                                        <p:attrNameLst>
+                                          <p:attrName>style.visibility</p:attrName>
+                                        </p:attrNameLst>
+                                      </p:cBhvr>
+                                      <p:to>
+                                        <p:strVal val="visible"/>
+                                      </p:to>
+                                    </p:set>
+                                    <p:animEffect transition="in" filter="fade">
+                                      <p:cBhvr>
+                                        <p:cTn id="7" dur="500"/>
+                                        <p:tgtEl>
+                                          <p:spTgt spid="4"/>
+                                        </p:tgtEl>
+                                      </p:cBhvr>
+                                    </p:animEffect>
+                                  </p:childTnLst>
+                                </p:cTn>
+                              </p:par>
+                              <p:par>
+                                <p:cTn id="8" presetID="10" presetClass="entr" presetSubtype="0" fill="hold" nodeType="withEffect">
+                                  <p:stCondLst>
+                                    <p:cond delay="300"/>
+                                  </p:stCondLst>
+                                  <p:childTnLst>
+                                    <p:set>
+                                      <p:cBhvr>
+                                        <p:cTn id="9" dur="1" fill="hold">
+                                          <p:stCondLst>
+                                            <p:cond delay="0"/>
+                                          </p:stCondLst>
+                                        </p:cTn>
+                                        <p:tgtEl>
+                                          <p:spTgt spid="27"/>
+                                        </p:tgtEl>
+                                        <p:attrNameLst>
+                                          <p:attrName>style.visibility</p:attrName>
+                                        </p:attrNameLst>
+                                      </p:cBhvr>
+                                      <p:to>
+                                        <p:strVal val="visible"/>
+                                      </p:to>
+                                    </p:set>
+                                    <p:animEffect transition="in" filter="fade">
+                                      <p:cBhvr>
+                                        <p:cTn id="10" dur="500"/>
+                                        <p:tgtEl>
+                                          <p:spTgt spid="27"/>
+                                        </p:tgtEl>
+                                      </p:cBhvr>
+                                    </p:animEffect>
+                                  </p:childTnLst>
+                                </p:cTn>
+                              </p:par>
+                              <p:par>
+                                <p:cTn id="11" presetID="10" presetClass="entr" presetSubtype="0" fill="hold" nodeType="withEffect">
+                                  <p:stCondLst>
+                                    <p:cond delay="600"/>
+                                  </p:stCondLst>
+                                  <p:childTnLst>
+                                    <p:set>
+                                      <p:cBhvr>
+                                        <p:cTn id="12" dur="1" fill="hold">
+                                          <p:stCondLst>
+                                            <p:cond delay="0"/>
+                                          </p:stCondLst>
+                                        </p:cTn>
+                                        <p:tgtEl>
+                                          <p:spTgt spid="28"/>
+                                        </p:tgtEl>
+                                        <p:attrNameLst>
+                                          <p:attrName>style.visibility</p:attrName>
+                                        </p:attrNameLst>
+                                      </p:cBhvr>
+                                      <p:to>
+                                        <p:strVal val="visible"/>
+                                      </p:to>
+                                    </p:set>
+                                    <p:animEffect transition="in" filter="fade">
+                                      <p:cBhvr>
+                                        <p:cTn id="13" dur="500"/>
+                                        <p:tgtEl>
+                                          <p:spTgt spid="28"/>
+                                        </p:tgtEl>
+                                      </p:cBhvr>
+                                    </p:animEffect>
+                                  </p:childTnLst>
+                                </p:cTn>
+                              </p:par>
+                              <p:par>
+                                <p:cTn id="14" presetID="10" presetClass="entr" presetSubtype="0" fill="hold" nodeType="withEffect">
+                                  <p:stCondLst>
+                                    <p:cond delay="900"/>
+                                  </p:stCondLst>
+                                  <p:childTnLst>
+                                    <p:set>
+                                      <p:cBhvr>
+                                        <p:cTn id="15" dur="1" fill="hold">
+                                          <p:stCondLst>
+                                            <p:cond delay="0"/>
+                                          </p:stCondLst>
+                                        </p:cTn>
+                                        <p:tgtEl>
+                                          <p:spTgt spid="29"/>
+                                        </p:tgtEl>
+                                        <p:attrNameLst>
+                                          <p:attrName>style.visibility</p:attrName>
+                                        </p:attrNameLst>
+                                      </p:cBhvr>
+                                      <p:to>
+                                        <p:strVal val="visible"/>
+                                      </p:to>
+                                    </p:set>
+                                    <p:animEffect transition="in" filter="fade">
+                                      <p:cBhvr>
+                                        <p:cTn id="16" dur="500"/>
+                                        <p:tgtEl>
+                                          <p:spTgt spid="29"/>
+                                        </p:tgtEl>
+                                      </p:cBhvr>
+                                    </p:animEffect>
+                                  </p:childTnLst>
+                                </p:cTn>
+                              </p:par>
+                            </p:childTnLst>
+                          </p:cTn>
+                        </p:par>
+                      </p:childTnLst>
+                    </p:cTn>
+                  </p:par>
+                </p:childTnLst>
+              </p:cTn>
+              <p:prevCondLst>
+                <p:cond evt="onPrev" delay="0">
+                  <p:tgtEl>
+                    <p:sldTgt/>
+                  </p:tgtEl>
+                </p:cond>
+              </p:prevCondLst>
+              <p:nextCondLst>
+                <p:cond evt="onNext" delay="0">
+                  <p:tgtEl>
+                    <p:sldTgt/>
+                  </p:tgtEl>
+                </p:cond>
+              </p:nextCondLst>
+            </p:seq>
+          </p:childTnLst>
+        </p:cTn>
+      </p:par>
+    </p:tnLst>
+  </p:timing>
 </p:sld>
 </file>
 
@@ -7103,6 +7747,244 @@
   <p:clrMapOvr>
     <a:masterClrMapping/>
   </p:clrMapOvr>
+  <mc:AlternateContent xmlns:mc="http://schemas.openxmlformats.org/markup-compatibility/2006">
+    <mc:Choice xmlns:p14="http://schemas.microsoft.com/office/powerpoint/2010/main" Requires="p14">
+      <p:transition spd="med" p14:dur="700">
+        <p:fade/>
+      </p:transition>
+    </mc:Choice>
+    <mc:Fallback>
+      <p:transition spd="med">
+        <p:fade/>
+      </p:transition>
+    </mc:Fallback>
+  </mc:AlternateContent>
+  <p:timing>
+    <p:tnLst>
+      <p:par>
+        <p:cTn id="1" dur="indefinite" restart="never" nodeType="tmRoot">
+          <p:childTnLst>
+            <p:seq concurrent="1" nextAc="seek">
+              <p:cTn id="2" dur="indefinite" nodeType="mainSeq">
+                <p:childTnLst>
+                  <p:par>
+                    <p:cTn id="3" fill="hold">
+                      <p:stCondLst>
+                        <p:cond delay="indefinite"/>
+                        <p:cond evt="onBegin" delay="0">
+                          <p:tn val="2"/>
+                        </p:cond>
+                      </p:stCondLst>
+                      <p:childTnLst>
+                        <p:par>
+                          <p:cTn id="4" fill="hold">
+                            <p:stCondLst>
+                              <p:cond delay="0"/>
+                            </p:stCondLst>
+                            <p:childTnLst>
+                              <p:par>
+                                <p:cTn id="5" presetID="10" presetClass="entr" presetSubtype="0" fill="hold" nodeType="afterEffect">
+                                  <p:stCondLst>
+                                    <p:cond delay="0"/>
+                                  </p:stCondLst>
+                                  <p:childTnLst>
+                                    <p:set>
+                                      <p:cBhvr>
+                                        <p:cTn id="6" dur="1" fill="hold">
+                                          <p:stCondLst>
+                                            <p:cond delay="0"/>
+                                          </p:stCondLst>
+                                        </p:cTn>
+                                        <p:tgtEl>
+                                          <p:spTgt spid="4"/>
+                                        </p:tgtEl>
+                                        <p:attrNameLst>
+                                          <p:attrName>style.visibility</p:attrName>
+                                        </p:attrNameLst>
+                                      </p:cBhvr>
+                                      <p:to>
+                                        <p:strVal val="visible"/>
+                                      </p:to>
+                                    </p:set>
+                                    <p:animEffect transition="in" filter="fade">
+                                      <p:cBhvr>
+                                        <p:cTn id="7" dur="500"/>
+                                        <p:tgtEl>
+                                          <p:spTgt spid="4"/>
+                                        </p:tgtEl>
+                                      </p:cBhvr>
+                                    </p:animEffect>
+                                  </p:childTnLst>
+                                </p:cTn>
+                              </p:par>
+                              <p:par>
+                                <p:cTn id="8" presetID="10" presetClass="entr" presetSubtype="0" fill="hold" nodeType="withEffect">
+                                  <p:stCondLst>
+                                    <p:cond delay="300"/>
+                                  </p:stCondLst>
+                                  <p:childTnLst>
+                                    <p:set>
+                                      <p:cBhvr>
+                                        <p:cTn id="9" dur="1" fill="hold">
+                                          <p:stCondLst>
+                                            <p:cond delay="0"/>
+                                          </p:stCondLst>
+                                        </p:cTn>
+                                        <p:tgtEl>
+                                          <p:spTgt spid="54"/>
+                                        </p:tgtEl>
+                                        <p:attrNameLst>
+                                          <p:attrName>style.visibility</p:attrName>
+                                        </p:attrNameLst>
+                                      </p:cBhvr>
+                                      <p:to>
+                                        <p:strVal val="visible"/>
+                                      </p:to>
+                                    </p:set>
+                                    <p:animEffect transition="in" filter="fade">
+                                      <p:cBhvr>
+                                        <p:cTn id="10" dur="500"/>
+                                        <p:tgtEl>
+                                          <p:spTgt spid="54"/>
+                                        </p:tgtEl>
+                                      </p:cBhvr>
+                                    </p:animEffect>
+                                  </p:childTnLst>
+                                </p:cTn>
+                              </p:par>
+                              <p:par>
+                                <p:cTn id="11" presetID="10" presetClass="entr" presetSubtype="0" fill="hold" nodeType="withEffect">
+                                  <p:stCondLst>
+                                    <p:cond delay="600"/>
+                                  </p:stCondLst>
+                                  <p:childTnLst>
+                                    <p:set>
+                                      <p:cBhvr>
+                                        <p:cTn id="12" dur="1" fill="hold">
+                                          <p:stCondLst>
+                                            <p:cond delay="0"/>
+                                          </p:stCondLst>
+                                        </p:cTn>
+                                        <p:tgtEl>
+                                          <p:spTgt spid="56"/>
+                                        </p:tgtEl>
+                                        <p:attrNameLst>
+                                          <p:attrName>style.visibility</p:attrName>
+                                        </p:attrNameLst>
+                                      </p:cBhvr>
+                                      <p:to>
+                                        <p:strVal val="visible"/>
+                                      </p:to>
+                                    </p:set>
+                                    <p:animEffect transition="in" filter="fade">
+                                      <p:cBhvr>
+                                        <p:cTn id="13" dur="500"/>
+                                        <p:tgtEl>
+                                          <p:spTgt spid="56"/>
+                                        </p:tgtEl>
+                                      </p:cBhvr>
+                                    </p:animEffect>
+                                  </p:childTnLst>
+                                </p:cTn>
+                              </p:par>
+                              <p:par>
+                                <p:cTn id="14" presetID="10" presetClass="entr" presetSubtype="0" fill="hold" nodeType="withEffect">
+                                  <p:stCondLst>
+                                    <p:cond delay="900"/>
+                                  </p:stCondLst>
+                                  <p:childTnLst>
+                                    <p:set>
+                                      <p:cBhvr>
+                                        <p:cTn id="15" dur="1" fill="hold">
+                                          <p:stCondLst>
+                                            <p:cond delay="0"/>
+                                          </p:stCondLst>
+                                        </p:cTn>
+                                        <p:tgtEl>
+                                          <p:spTgt spid="57"/>
+                                        </p:tgtEl>
+                                        <p:attrNameLst>
+                                          <p:attrName>style.visibility</p:attrName>
+                                        </p:attrNameLst>
+                                      </p:cBhvr>
+                                      <p:to>
+                                        <p:strVal val="visible"/>
+                                      </p:to>
+                                    </p:set>
+                                    <p:animEffect transition="in" filter="fade">
+                                      <p:cBhvr>
+                                        <p:cTn id="16" dur="500"/>
+                                        <p:tgtEl>
+                                          <p:spTgt spid="57"/>
+                                        </p:tgtEl>
+                                      </p:cBhvr>
+                                    </p:animEffect>
+                                  </p:childTnLst>
+                                </p:cTn>
+                              </p:par>
+                              <p:par>
+                                <p:cTn id="17" presetID="10" presetClass="entr" presetSubtype="0" fill="hold" nodeType="withEffect">
+                                  <p:stCondLst>
+                                    <p:cond delay="1200"/>
+                                  </p:stCondLst>
+                                  <p:childTnLst>
+                                    <p:set>
+                                      <p:cBhvr>
+                                        <p:cTn id="18" dur="1" fill="hold">
+                                          <p:stCondLst>
+                                            <p:cond delay="0"/>
+                                          </p:stCondLst>
+                                        </p:cTn>
+                                        <p:tgtEl>
+                                          <p:spTgt spid="58"/>
+                                        </p:tgtEl>
+                                        <p:attrNameLst>
+                                          <p:attrName>style.visibility</p:attrName>
+                                        </p:attrNameLst>
+                                      </p:cBhvr>
+                                      <p:to>
+                                        <p:strVal val="visible"/>
+                                      </p:to>
+                                    </p:set>
+                                    <p:animEffect transition="in" filter="fade">
+                                      <p:cBhvr>
+                                        <p:cTn id="19" dur="500"/>
+                                        <p:tgtEl>
+                                          <p:spTgt spid="58"/>
+                                        </p:tgtEl>
+                                      </p:cBhvr>
+                                    </p:animEffect>
+                                  </p:childTnLst>
+                                </p:cTn>
+                              </p:par>
+                            </p:childTnLst>
+                          </p:cTn>
+                        </p:par>
+                      </p:childTnLst>
+                    </p:cTn>
+                  </p:par>
+                </p:childTnLst>
+              </p:cTn>
+              <p:prevCondLst>
+                <p:cond evt="onPrev" delay="0">
+                  <p:tgtEl>
+                    <p:sldTgt/>
+                  </p:tgtEl>
+                </p:cond>
+              </p:prevCondLst>
+              <p:nextCondLst>
+                <p:cond evt="onNext" delay="0">
+                  <p:tgtEl>
+                    <p:sldTgt/>
+                  </p:tgtEl>
+                </p:cond>
+              </p:nextCondLst>
+            </p:seq>
+          </p:childTnLst>
+        </p:cTn>
+      </p:par>
+    </p:tnLst>
+  </p:timing>
 </p:sld>
 </file>
 
@@ -7671,6 +8553,209 @@
   <p:clrMapOvr>
     <a:masterClrMapping/>
   </p:clrMapOvr>
+  <mc:AlternateContent xmlns:mc="http://schemas.openxmlformats.org/markup-compatibility/2006">
+    <mc:Choice xmlns:p14="http://schemas.microsoft.com/office/powerpoint/2010/main" Requires="p14">
+      <p:transition spd="med" p14:dur="700">
+        <p:fade/>
+      </p:transition>
+    </mc:Choice>
+    <mc:Fallback>
+      <p:transition spd="med">
+        <p:fade/>
+      </p:transition>
+    </mc:Fallback>
+  </mc:AlternateContent>
+  <p:timing>
+    <p:tnLst>
+      <p:par>
+        <p:cTn id="1" dur="indefinite" restart="never" nodeType="tmRoot">
+          <p:childTnLst>
+            <p:seq concurrent="1" nextAc="seek">
+              <p:cTn id="2" dur="indefinite" nodeType="mainSeq">
+                <p:childTnLst>
+                  <p:par>
+                    <p:cTn id="3" fill="hold">
+                      <p:stCondLst>
+                        <p:cond delay="indefinite"/>
+                        <p:cond evt="onBegin" delay="0">
+                          <p:tn val="2"/>
+                        </p:cond>
+                      </p:stCondLst>
+                      <p:childTnLst>
+                        <p:par>
+                          <p:cTn id="4" fill="hold">
+                            <p:stCondLst>
+                              <p:cond delay="0"/>
+                            </p:stCondLst>
+                            <p:childTnLst>
+                              <p:par>
+                                <p:cTn id="5" presetID="10" presetClass="entr" presetSubtype="0" fill="hold" nodeType="afterEffect">
+                                  <p:stCondLst>
+                                    <p:cond delay="0"/>
+                                  </p:stCondLst>
+                                  <p:childTnLst>
+                                    <p:set>
+                                      <p:cBhvr>
+                                        <p:cTn id="6" dur="1" fill="hold">
+                                          <p:stCondLst>
+                                            <p:cond delay="0"/>
+                                          </p:stCondLst>
+                                        </p:cTn>
+                                        <p:tgtEl>
+                                          <p:spTgt spid="4"/>
+                                        </p:tgtEl>
+                                        <p:attrNameLst>
+                                          <p:attrName>style.visibility</p:attrName>
+                                        </p:attrNameLst>
+                                      </p:cBhvr>
+                                      <p:to>
+                                        <p:strVal val="visible"/>
+                                      </p:to>
+                                    </p:set>
+                                    <p:animEffect transition="in" filter="fade">
+                                      <p:cBhvr>
+                                        <p:cTn id="7" dur="500"/>
+                                        <p:tgtEl>
+                                          <p:spTgt spid="4"/>
+                                        </p:tgtEl>
+                                      </p:cBhvr>
+                                    </p:animEffect>
+                                  </p:childTnLst>
+                                </p:cTn>
+                              </p:par>
+                              <p:par>
+                                <p:cTn id="8" presetID="10" presetClass="entr" presetSubtype="0" fill="hold" nodeType="withEffect">
+                                  <p:stCondLst>
+                                    <p:cond delay="300"/>
+                                  </p:stCondLst>
+                                  <p:childTnLst>
+                                    <p:set>
+                                      <p:cBhvr>
+                                        <p:cTn id="9" dur="1" fill="hold">
+                                          <p:stCondLst>
+                                            <p:cond delay="0"/>
+                                          </p:stCondLst>
+                                        </p:cTn>
+                                        <p:tgtEl>
+                                          <p:spTgt spid="13"/>
+                                        </p:tgtEl>
+                                        <p:attrNameLst>
+                                          <p:attrName>style.visibility</p:attrName>
+                                        </p:attrNameLst>
+                                      </p:cBhvr>
+                                      <p:to>
+                                        <p:strVal val="visible"/>
+                                      </p:to>
+                                    </p:set>
+                                    <p:animEffect transition="in" filter="fade">
+                                      <p:cBhvr>
+                                        <p:cTn id="10" dur="500"/>
+                                        <p:tgtEl>
+                                          <p:spTgt spid="13"/>
+                                        </p:tgtEl>
+                                      </p:cBhvr>
+                                    </p:animEffect>
+                                  </p:childTnLst>
+                                </p:cTn>
+                              </p:par>
+                              <p:par>
+                                <p:cTn id="11" presetID="10" presetClass="entr" presetSubtype="0" fill="hold" nodeType="withEffect">
+                                  <p:stCondLst>
+                                    <p:cond delay="600"/>
+                                  </p:stCondLst>
+                                  <p:childTnLst>
+                                    <p:set>
+                                      <p:cBhvr>
+                                        <p:cTn id="12" dur="1" fill="hold">
+                                          <p:stCondLst>
+                                            <p:cond delay="0"/>
+                                          </p:stCondLst>
+                                        </p:cTn>
+                                        <p:tgtEl>
+                                          <p:spTgt spid="14"/>
+                                        </p:tgtEl>
+                                        <p:attrNameLst>
+                                          <p:attrName>style.visibility</p:attrName>
+                                        </p:attrNameLst>
+                                      </p:cBhvr>
+                                      <p:to>
+                                        <p:strVal val="visible"/>
+                                      </p:to>
+                                    </p:set>
+                                    <p:animEffect transition="in" filter="fade">
+                                      <p:cBhvr>
+                                        <p:cTn id="13" dur="500"/>
+                                        <p:tgtEl>
+                                          <p:spTgt spid="14"/>
+                                        </p:tgtEl>
+                                      </p:cBhvr>
+                                    </p:animEffect>
+                                  </p:childTnLst>
+                                </p:cTn>
+                              </p:par>
+                              <p:par>
+                                <p:cTn id="14" presetID="10" presetClass="entr" presetSubtype="0" fill="hold" nodeType="withEffect">
+                                  <p:stCondLst>
+                                    <p:cond delay="900"/>
+                                  </p:stCondLst>
+                                  <p:childTnLst>
+                                    <p:set>
+                                      <p:cBhvr>
+                                        <p:cTn id="15" dur="1" fill="hold">
+                                          <p:stCondLst>
+                                            <p:cond delay="0"/>
+                                          </p:stCondLst>
+                                        </p:cTn>
+                                        <p:tgtEl>
+                                          <p:spTgt spid="15"/>
+                                        </p:tgtEl>
+                                        <p:attrNameLst>
+                                          <p:attrName>style.visibility</p:attrName>
+                                        </p:attrNameLst>
+                                      </p:cBhvr>
+                                      <p:to>
+                                        <p:strVal val="visible"/>
+                                      </p:to>
+                                    </p:set>
+                                    <p:animEffect transition="in" filter="fade">
+                                      <p:cBhvr>
+                                        <p:cTn id="16" dur="500"/>
+                                        <p:tgtEl>
+                                          <p:spTgt spid="15"/>
+                                        </p:tgtEl>
+                                      </p:cBhvr>
+                                    </p:animEffect>
+                                  </p:childTnLst>
+                                </p:cTn>
+                              </p:par>
+                            </p:childTnLst>
+                          </p:cTn>
+                        </p:par>
+                      </p:childTnLst>
+                    </p:cTn>
+                  </p:par>
+                </p:childTnLst>
+              </p:cTn>
+              <p:prevCondLst>
+                <p:cond evt="onPrev" delay="0">
+                  <p:tgtEl>
+                    <p:sldTgt/>
+                  </p:tgtEl>
+                </p:cond>
+              </p:prevCondLst>
+              <p:nextCondLst>
+                <p:cond evt="onNext" delay="0">
+                  <p:tgtEl>
+                    <p:sldTgt/>
+                  </p:tgtEl>
+                </p:cond>
+              </p:nextCondLst>
+            </p:seq>
+          </p:childTnLst>
+        </p:cTn>
+      </p:par>
+    </p:tnLst>
+  </p:timing>
 </p:sld>
 </file>
 
@@ -10257,6 +11342,209 @@
   <p:clrMapOvr>
     <a:masterClrMapping/>
   </p:clrMapOvr>
+  <mc:AlternateContent xmlns:mc="http://schemas.openxmlformats.org/markup-compatibility/2006">
+    <mc:Choice xmlns:p14="http://schemas.microsoft.com/office/powerpoint/2010/main" Requires="p14">
+      <p:transition spd="med" p14:dur="700">
+        <p:fade/>
+      </p:transition>
+    </mc:Choice>
+    <mc:Fallback>
+      <p:transition spd="med">
+        <p:fade/>
+      </p:transition>
+    </mc:Fallback>
+  </mc:AlternateContent>
+  <p:timing>
+    <p:tnLst>
+      <p:par>
+        <p:cTn id="1" dur="indefinite" restart="never" nodeType="tmRoot">
+          <p:childTnLst>
+            <p:seq concurrent="1" nextAc="seek">
+              <p:cTn id="2" dur="indefinite" nodeType="mainSeq">
+                <p:childTnLst>
+                  <p:par>
+                    <p:cTn id="3" fill="hold">
+                      <p:stCondLst>
+                        <p:cond delay="indefinite"/>
+                        <p:cond evt="onBegin" delay="0">
+                          <p:tn val="2"/>
+                        </p:cond>
+                      </p:stCondLst>
+                      <p:childTnLst>
+                        <p:par>
+                          <p:cTn id="4" fill="hold">
+                            <p:stCondLst>
+                              <p:cond delay="0"/>
+                            </p:stCondLst>
+                            <p:childTnLst>
+                              <p:par>
+                                <p:cTn id="5" presetID="10" presetClass="entr" presetSubtype="0" fill="hold" nodeType="afterEffect">
+                                  <p:stCondLst>
+                                    <p:cond delay="0"/>
+                                  </p:stCondLst>
+                                  <p:childTnLst>
+                                    <p:set>
+                                      <p:cBhvr>
+                                        <p:cTn id="6" dur="1" fill="hold">
+                                          <p:stCondLst>
+                                            <p:cond delay="0"/>
+                                          </p:stCondLst>
+                                        </p:cTn>
+                                        <p:tgtEl>
+                                          <p:spTgt spid="4"/>
+                                        </p:tgtEl>
+                                        <p:attrNameLst>
+                                          <p:attrName>style.visibility</p:attrName>
+                                        </p:attrNameLst>
+                                      </p:cBhvr>
+                                      <p:to>
+                                        <p:strVal val="visible"/>
+                                      </p:to>
+                                    </p:set>
+                                    <p:animEffect transition="in" filter="fade">
+                                      <p:cBhvr>
+                                        <p:cTn id="7" dur="500"/>
+                                        <p:tgtEl>
+                                          <p:spTgt spid="4"/>
+                                        </p:tgtEl>
+                                      </p:cBhvr>
+                                    </p:animEffect>
+                                  </p:childTnLst>
+                                </p:cTn>
+                              </p:par>
+                              <p:par>
+                                <p:cTn id="8" presetID="10" presetClass="entr" presetSubtype="0" fill="hold" nodeType="withEffect">
+                                  <p:stCondLst>
+                                    <p:cond delay="300"/>
+                                  </p:stCondLst>
+                                  <p:childTnLst>
+                                    <p:set>
+                                      <p:cBhvr>
+                                        <p:cTn id="9" dur="1" fill="hold">
+                                          <p:stCondLst>
+                                            <p:cond delay="0"/>
+                                          </p:stCondLst>
+                                        </p:cTn>
+                                        <p:tgtEl>
+                                          <p:spTgt spid="78"/>
+                                        </p:tgtEl>
+                                        <p:attrNameLst>
+                                          <p:attrName>style.visibility</p:attrName>
+                                        </p:attrNameLst>
+                                      </p:cBhvr>
+                                      <p:to>
+                                        <p:strVal val="visible"/>
+                                      </p:to>
+                                    </p:set>
+                                    <p:animEffect transition="in" filter="fade">
+                                      <p:cBhvr>
+                                        <p:cTn id="10" dur="500"/>
+                                        <p:tgtEl>
+                                          <p:spTgt spid="78"/>
+                                        </p:tgtEl>
+                                      </p:cBhvr>
+                                    </p:animEffect>
+                                  </p:childTnLst>
+                                </p:cTn>
+                              </p:par>
+                              <p:par>
+                                <p:cTn id="11" presetID="10" presetClass="entr" presetSubtype="0" fill="hold" nodeType="withEffect">
+                                  <p:stCondLst>
+                                    <p:cond delay="600"/>
+                                  </p:stCondLst>
+                                  <p:childTnLst>
+                                    <p:set>
+                                      <p:cBhvr>
+                                        <p:cTn id="12" dur="1" fill="hold">
+                                          <p:stCondLst>
+                                            <p:cond delay="0"/>
+                                          </p:stCondLst>
+                                        </p:cTn>
+                                        <p:tgtEl>
+                                          <p:spTgt spid="79"/>
+                                        </p:tgtEl>
+                                        <p:attrNameLst>
+                                          <p:attrName>style.visibility</p:attrName>
+                                        </p:attrNameLst>
+                                      </p:cBhvr>
+                                      <p:to>
+                                        <p:strVal val="visible"/>
+                                      </p:to>
+                                    </p:set>
+                                    <p:animEffect transition="in" filter="fade">
+                                      <p:cBhvr>
+                                        <p:cTn id="13" dur="500"/>
+                                        <p:tgtEl>
+                                          <p:spTgt spid="79"/>
+                                        </p:tgtEl>
+                                      </p:cBhvr>
+                                    </p:animEffect>
+                                  </p:childTnLst>
+                                </p:cTn>
+                              </p:par>
+                              <p:par>
+                                <p:cTn id="14" presetID="10" presetClass="entr" presetSubtype="0" fill="hold" nodeType="withEffect">
+                                  <p:stCondLst>
+                                    <p:cond delay="900"/>
+                                  </p:stCondLst>
+                                  <p:childTnLst>
+                                    <p:set>
+                                      <p:cBhvr>
+                                        <p:cTn id="15" dur="1" fill="hold">
+                                          <p:stCondLst>
+                                            <p:cond delay="0"/>
+                                          </p:stCondLst>
+                                        </p:cTn>
+                                        <p:tgtEl>
+                                          <p:spTgt spid="80"/>
+                                        </p:tgtEl>
+                                        <p:attrNameLst>
+                                          <p:attrName>style.visibility</p:attrName>
+                                        </p:attrNameLst>
+                                      </p:cBhvr>
+                                      <p:to>
+                                        <p:strVal val="visible"/>
+                                      </p:to>
+                                    </p:set>
+                                    <p:animEffect transition="in" filter="fade">
+                                      <p:cBhvr>
+                                        <p:cTn id="16" dur="500"/>
+                                        <p:tgtEl>
+                                          <p:spTgt spid="80"/>
+                                        </p:tgtEl>
+                                      </p:cBhvr>
+                                    </p:animEffect>
+                                  </p:childTnLst>
+                                </p:cTn>
+                              </p:par>
+                            </p:childTnLst>
+                          </p:cTn>
+                        </p:par>
+                      </p:childTnLst>
+                    </p:cTn>
+                  </p:par>
+                </p:childTnLst>
+              </p:cTn>
+              <p:prevCondLst>
+                <p:cond evt="onPrev" delay="0">
+                  <p:tgtEl>
+                    <p:sldTgt/>
+                  </p:tgtEl>
+                </p:cond>
+              </p:prevCondLst>
+              <p:nextCondLst>
+                <p:cond evt="onNext" delay="0">
+                  <p:tgtEl>
+                    <p:sldTgt/>
+                  </p:tgtEl>
+                </p:cond>
+              </p:nextCondLst>
+            </p:seq>
+          </p:childTnLst>
+        </p:cTn>
+      </p:par>
+    </p:tnLst>
+  </p:timing>
 </p:sld>
 </file>
 
@@ -12744,6 +14032,209 @@
   <p:clrMapOvr>
     <a:masterClrMapping/>
   </p:clrMapOvr>
+  <mc:AlternateContent xmlns:mc="http://schemas.openxmlformats.org/markup-compatibility/2006">
+    <mc:Choice xmlns:p14="http://schemas.microsoft.com/office/powerpoint/2010/main" Requires="p14">
+      <p:transition spd="med" p14:dur="700">
+        <p:fade/>
+      </p:transition>
+    </mc:Choice>
+    <mc:Fallback>
+      <p:transition spd="med">
+        <p:fade/>
+      </p:transition>
+    </mc:Fallback>
+  </mc:AlternateContent>
+  <p:timing>
+    <p:tnLst>
+      <p:par>
+        <p:cTn id="1" dur="indefinite" restart="never" nodeType="tmRoot">
+          <p:childTnLst>
+            <p:seq concurrent="1" nextAc="seek">
+              <p:cTn id="2" dur="indefinite" nodeType="mainSeq">
+                <p:childTnLst>
+                  <p:par>
+                    <p:cTn id="3" fill="hold">
+                      <p:stCondLst>
+                        <p:cond delay="indefinite"/>
+                        <p:cond evt="onBegin" delay="0">
+                          <p:tn val="2"/>
+                        </p:cond>
+                      </p:stCondLst>
+                      <p:childTnLst>
+                        <p:par>
+                          <p:cTn id="4" fill="hold">
+                            <p:stCondLst>
+                              <p:cond delay="0"/>
+                            </p:stCondLst>
+                            <p:childTnLst>
+                              <p:par>
+                                <p:cTn id="5" presetID="10" presetClass="entr" presetSubtype="0" fill="hold" nodeType="afterEffect">
+                                  <p:stCondLst>
+                                    <p:cond delay="0"/>
+                                  </p:stCondLst>
+                                  <p:childTnLst>
+                                    <p:set>
+                                      <p:cBhvr>
+                                        <p:cTn id="6" dur="1" fill="hold">
+                                          <p:stCondLst>
+                                            <p:cond delay="0"/>
+                                          </p:stCondLst>
+                                        </p:cTn>
+                                        <p:tgtEl>
+                                          <p:spTgt spid="4"/>
+                                        </p:tgtEl>
+                                        <p:attrNameLst>
+                                          <p:attrName>style.visibility</p:attrName>
+                                        </p:attrNameLst>
+                                      </p:cBhvr>
+                                      <p:to>
+                                        <p:strVal val="visible"/>
+                                      </p:to>
+                                    </p:set>
+                                    <p:animEffect transition="in" filter="fade">
+                                      <p:cBhvr>
+                                        <p:cTn id="7" dur="500"/>
+                                        <p:tgtEl>
+                                          <p:spTgt spid="4"/>
+                                        </p:tgtEl>
+                                      </p:cBhvr>
+                                    </p:animEffect>
+                                  </p:childTnLst>
+                                </p:cTn>
+                              </p:par>
+                              <p:par>
+                                <p:cTn id="8" presetID="10" presetClass="entr" presetSubtype="0" fill="hold" nodeType="withEffect">
+                                  <p:stCondLst>
+                                    <p:cond delay="300"/>
+                                  </p:stCondLst>
+                                  <p:childTnLst>
+                                    <p:set>
+                                      <p:cBhvr>
+                                        <p:cTn id="9" dur="1" fill="hold">
+                                          <p:stCondLst>
+                                            <p:cond delay="0"/>
+                                          </p:stCondLst>
+                                        </p:cTn>
+                                        <p:tgtEl>
+                                          <p:spTgt spid="85"/>
+                                        </p:tgtEl>
+                                        <p:attrNameLst>
+                                          <p:attrName>style.visibility</p:attrName>
+                                        </p:attrNameLst>
+                                      </p:cBhvr>
+                                      <p:to>
+                                        <p:strVal val="visible"/>
+                                      </p:to>
+                                    </p:set>
+                                    <p:animEffect transition="in" filter="fade">
+                                      <p:cBhvr>
+                                        <p:cTn id="10" dur="500"/>
+                                        <p:tgtEl>
+                                          <p:spTgt spid="85"/>
+                                        </p:tgtEl>
+                                      </p:cBhvr>
+                                    </p:animEffect>
+                                  </p:childTnLst>
+                                </p:cTn>
+                              </p:par>
+                              <p:par>
+                                <p:cTn id="11" presetID="10" presetClass="entr" presetSubtype="0" fill="hold" nodeType="withEffect">
+                                  <p:stCondLst>
+                                    <p:cond delay="600"/>
+                                  </p:stCondLst>
+                                  <p:childTnLst>
+                                    <p:set>
+                                      <p:cBhvr>
+                                        <p:cTn id="12" dur="1" fill="hold">
+                                          <p:stCondLst>
+                                            <p:cond delay="0"/>
+                                          </p:stCondLst>
+                                        </p:cTn>
+                                        <p:tgtEl>
+                                          <p:spTgt spid="86"/>
+                                        </p:tgtEl>
+                                        <p:attrNameLst>
+                                          <p:attrName>style.visibility</p:attrName>
+                                        </p:attrNameLst>
+                                      </p:cBhvr>
+                                      <p:to>
+                                        <p:strVal val="visible"/>
+                                      </p:to>
+                                    </p:set>
+                                    <p:animEffect transition="in" filter="fade">
+                                      <p:cBhvr>
+                                        <p:cTn id="13" dur="500"/>
+                                        <p:tgtEl>
+                                          <p:spTgt spid="86"/>
+                                        </p:tgtEl>
+                                      </p:cBhvr>
+                                    </p:animEffect>
+                                  </p:childTnLst>
+                                </p:cTn>
+                              </p:par>
+                              <p:par>
+                                <p:cTn id="14" presetID="10" presetClass="entr" presetSubtype="0" fill="hold" nodeType="withEffect">
+                                  <p:stCondLst>
+                                    <p:cond delay="900"/>
+                                  </p:stCondLst>
+                                  <p:childTnLst>
+                                    <p:set>
+                                      <p:cBhvr>
+                                        <p:cTn id="15" dur="1" fill="hold">
+                                          <p:stCondLst>
+                                            <p:cond delay="0"/>
+                                          </p:stCondLst>
+                                        </p:cTn>
+                                        <p:tgtEl>
+                                          <p:spTgt spid="87"/>
+                                        </p:tgtEl>
+                                        <p:attrNameLst>
+                                          <p:attrName>style.visibility</p:attrName>
+                                        </p:attrNameLst>
+                                      </p:cBhvr>
+                                      <p:to>
+                                        <p:strVal val="visible"/>
+                                      </p:to>
+                                    </p:set>
+                                    <p:animEffect transition="in" filter="fade">
+                                      <p:cBhvr>
+                                        <p:cTn id="16" dur="500"/>
+                                        <p:tgtEl>
+                                          <p:spTgt spid="87"/>
+                                        </p:tgtEl>
+                                      </p:cBhvr>
+                                    </p:animEffect>
+                                  </p:childTnLst>
+                                </p:cTn>
+                              </p:par>
+                            </p:childTnLst>
+                          </p:cTn>
+                        </p:par>
+                      </p:childTnLst>
+                    </p:cTn>
+                  </p:par>
+                </p:childTnLst>
+              </p:cTn>
+              <p:prevCondLst>
+                <p:cond evt="onPrev" delay="0">
+                  <p:tgtEl>
+                    <p:sldTgt/>
+                  </p:tgtEl>
+                </p:cond>
+              </p:prevCondLst>
+              <p:nextCondLst>
+                <p:cond evt="onNext" delay="0">
+                  <p:tgtEl>
+                    <p:sldTgt/>
+                  </p:tgtEl>
+                </p:cond>
+              </p:nextCondLst>
+            </p:seq>
+          </p:childTnLst>
+        </p:cTn>
+      </p:par>
+    </p:tnLst>
+  </p:timing>
 </p:sld>
 </file>
 
@@ -13662,6 +15153,209 @@
   <p:clrMapOvr>
     <a:masterClrMapping/>
   </p:clrMapOvr>
+  <mc:AlternateContent xmlns:mc="http://schemas.openxmlformats.org/markup-compatibility/2006">
+    <mc:Choice xmlns:p14="http://schemas.microsoft.com/office/powerpoint/2010/main" Requires="p14">
+      <p:transition spd="med" p14:dur="700">
+        <p:fade/>
+      </p:transition>
+    </mc:Choice>
+    <mc:Fallback>
+      <p:transition spd="med">
+        <p:fade/>
+      </p:transition>
+    </mc:Fallback>
+  </mc:AlternateContent>
+  <p:timing>
+    <p:tnLst>
+      <p:par>
+        <p:cTn id="1" dur="indefinite" restart="never" nodeType="tmRoot">
+          <p:childTnLst>
+            <p:seq concurrent="1" nextAc="seek">
+              <p:cTn id="2" dur="indefinite" nodeType="mainSeq">
+                <p:childTnLst>
+                  <p:par>
+                    <p:cTn id="3" fill="hold">
+                      <p:stCondLst>
+                        <p:cond delay="indefinite"/>
+                        <p:cond evt="onBegin" delay="0">
+                          <p:tn val="2"/>
+                        </p:cond>
+                      </p:stCondLst>
+                      <p:childTnLst>
+                        <p:par>
+                          <p:cTn id="4" fill="hold">
+                            <p:stCondLst>
+                              <p:cond delay="0"/>
+                            </p:stCondLst>
+                            <p:childTnLst>
+                              <p:par>
+                                <p:cTn id="5" presetID="10" presetClass="entr" presetSubtype="0" fill="hold" nodeType="afterEffect">
+                                  <p:stCondLst>
+                                    <p:cond delay="0"/>
+                                  </p:stCondLst>
+                                  <p:childTnLst>
+                                    <p:set>
+                                      <p:cBhvr>
+                                        <p:cTn id="6" dur="1" fill="hold">
+                                          <p:stCondLst>
+                                            <p:cond delay="0"/>
+                                          </p:stCondLst>
+                                        </p:cTn>
+                                        <p:tgtEl>
+                                          <p:spTgt spid="4"/>
+                                        </p:tgtEl>
+                                        <p:attrNameLst>
+                                          <p:attrName>style.visibility</p:attrName>
+                                        </p:attrNameLst>
+                                      </p:cBhvr>
+                                      <p:to>
+                                        <p:strVal val="visible"/>
+                                      </p:to>
+                                    </p:set>
+                                    <p:animEffect transition="in" filter="fade">
+                                      <p:cBhvr>
+                                        <p:cTn id="7" dur="500"/>
+                                        <p:tgtEl>
+                                          <p:spTgt spid="4"/>
+                                        </p:tgtEl>
+                                      </p:cBhvr>
+                                    </p:animEffect>
+                                  </p:childTnLst>
+                                </p:cTn>
+                              </p:par>
+                              <p:par>
+                                <p:cTn id="8" presetID="10" presetClass="entr" presetSubtype="0" fill="hold" nodeType="withEffect">
+                                  <p:stCondLst>
+                                    <p:cond delay="300"/>
+                                  </p:stCondLst>
+                                  <p:childTnLst>
+                                    <p:set>
+                                      <p:cBhvr>
+                                        <p:cTn id="9" dur="1" fill="hold">
+                                          <p:stCondLst>
+                                            <p:cond delay="0"/>
+                                          </p:stCondLst>
+                                        </p:cTn>
+                                        <p:tgtEl>
+                                          <p:spTgt spid="26"/>
+                                        </p:tgtEl>
+                                        <p:attrNameLst>
+                                          <p:attrName>style.visibility</p:attrName>
+                                        </p:attrNameLst>
+                                      </p:cBhvr>
+                                      <p:to>
+                                        <p:strVal val="visible"/>
+                                      </p:to>
+                                    </p:set>
+                                    <p:animEffect transition="in" filter="fade">
+                                      <p:cBhvr>
+                                        <p:cTn id="10" dur="500"/>
+                                        <p:tgtEl>
+                                          <p:spTgt spid="26"/>
+                                        </p:tgtEl>
+                                      </p:cBhvr>
+                                    </p:animEffect>
+                                  </p:childTnLst>
+                                </p:cTn>
+                              </p:par>
+                              <p:par>
+                                <p:cTn id="11" presetID="10" presetClass="entr" presetSubtype="0" fill="hold" nodeType="withEffect">
+                                  <p:stCondLst>
+                                    <p:cond delay="600"/>
+                                  </p:stCondLst>
+                                  <p:childTnLst>
+                                    <p:set>
+                                      <p:cBhvr>
+                                        <p:cTn id="12" dur="1" fill="hold">
+                                          <p:stCondLst>
+                                            <p:cond delay="0"/>
+                                          </p:stCondLst>
+                                        </p:cTn>
+                                        <p:tgtEl>
+                                          <p:spTgt spid="27"/>
+                                        </p:tgtEl>
+                                        <p:attrNameLst>
+                                          <p:attrName>style.visibility</p:attrName>
+                                        </p:attrNameLst>
+                                      </p:cBhvr>
+                                      <p:to>
+                                        <p:strVal val="visible"/>
+                                      </p:to>
+                                    </p:set>
+                                    <p:animEffect transition="in" filter="fade">
+                                      <p:cBhvr>
+                                        <p:cTn id="13" dur="500"/>
+                                        <p:tgtEl>
+                                          <p:spTgt spid="27"/>
+                                        </p:tgtEl>
+                                      </p:cBhvr>
+                                    </p:animEffect>
+                                  </p:childTnLst>
+                                </p:cTn>
+                              </p:par>
+                              <p:par>
+                                <p:cTn id="14" presetID="10" presetClass="entr" presetSubtype="0" fill="hold" nodeType="withEffect">
+                                  <p:stCondLst>
+                                    <p:cond delay="900"/>
+                                  </p:stCondLst>
+                                  <p:childTnLst>
+                                    <p:set>
+                                      <p:cBhvr>
+                                        <p:cTn id="15" dur="1" fill="hold">
+                                          <p:stCondLst>
+                                            <p:cond delay="0"/>
+                                          </p:stCondLst>
+                                        </p:cTn>
+                                        <p:tgtEl>
+                                          <p:spTgt spid="28"/>
+                                        </p:tgtEl>
+                                        <p:attrNameLst>
+                                          <p:attrName>style.visibility</p:attrName>
+                                        </p:attrNameLst>
+                                      </p:cBhvr>
+                                      <p:to>
+                                        <p:strVal val="visible"/>
+                                      </p:to>
+                                    </p:set>
+                                    <p:animEffect transition="in" filter="fade">
+                                      <p:cBhvr>
+                                        <p:cTn id="16" dur="500"/>
+                                        <p:tgtEl>
+                                          <p:spTgt spid="28"/>
+                                        </p:tgtEl>
+                                      </p:cBhvr>
+                                    </p:animEffect>
+                                  </p:childTnLst>
+                                </p:cTn>
+                              </p:par>
+                            </p:childTnLst>
+                          </p:cTn>
+                        </p:par>
+                      </p:childTnLst>
+                    </p:cTn>
+                  </p:par>
+                </p:childTnLst>
+              </p:cTn>
+              <p:prevCondLst>
+                <p:cond evt="onPrev" delay="0">
+                  <p:tgtEl>
+                    <p:sldTgt/>
+                  </p:tgtEl>
+                </p:cond>
+              </p:prevCondLst>
+              <p:nextCondLst>
+                <p:cond evt="onNext" delay="0">
+                  <p:tgtEl>
+                    <p:sldTgt/>
+                  </p:tgtEl>
+                </p:cond>
+              </p:nextCondLst>
+            </p:seq>
+          </p:childTnLst>
+        </p:cTn>
+      </p:par>
+    </p:tnLst>
+  </p:timing>
 </p:sld>
 </file>
 
@@ -16121,6 +17815,244 @@
   <p:clrMapOvr>
     <a:masterClrMapping/>
   </p:clrMapOvr>
+  <mc:AlternateContent xmlns:mc="http://schemas.openxmlformats.org/markup-compatibility/2006">
+    <mc:Choice xmlns:p14="http://schemas.microsoft.com/office/powerpoint/2010/main" Requires="p14">
+      <p:transition spd="med" p14:dur="700">
+        <p:fade/>
+      </p:transition>
+    </mc:Choice>
+    <mc:Fallback>
+      <p:transition spd="med">
+        <p:fade/>
+      </p:transition>
+    </mc:Fallback>
+  </mc:AlternateContent>
+  <p:timing>
+    <p:tnLst>
+      <p:par>
+        <p:cTn id="1" dur="indefinite" restart="never" nodeType="tmRoot">
+          <p:childTnLst>
+            <p:seq concurrent="1" nextAc="seek">
+              <p:cTn id="2" dur="indefinite" nodeType="mainSeq">
+                <p:childTnLst>
+                  <p:par>
+                    <p:cTn id="3" fill="hold">
+                      <p:stCondLst>
+                        <p:cond delay="indefinite"/>
+                        <p:cond evt="onBegin" delay="0">
+                          <p:tn val="2"/>
+                        </p:cond>
+                      </p:stCondLst>
+                      <p:childTnLst>
+                        <p:par>
+                          <p:cTn id="4" fill="hold">
+                            <p:stCondLst>
+                              <p:cond delay="0"/>
+                            </p:stCondLst>
+                            <p:childTnLst>
+                              <p:par>
+                                <p:cTn id="5" presetID="10" presetClass="entr" presetSubtype="0" fill="hold" nodeType="afterEffect">
+                                  <p:stCondLst>
+                                    <p:cond delay="0"/>
+                                  </p:stCondLst>
+                                  <p:childTnLst>
+                                    <p:set>
+                                      <p:cBhvr>
+                                        <p:cTn id="6" dur="1" fill="hold">
+                                          <p:stCondLst>
+                                            <p:cond delay="0"/>
+                                          </p:stCondLst>
+                                        </p:cTn>
+                                        <p:tgtEl>
+                                          <p:spTgt spid="4"/>
+                                        </p:tgtEl>
+                                        <p:attrNameLst>
+                                          <p:attrName>style.visibility</p:attrName>
+                                        </p:attrNameLst>
+                                      </p:cBhvr>
+                                      <p:to>
+                                        <p:strVal val="visible"/>
+                                      </p:to>
+                                    </p:set>
+                                    <p:animEffect transition="in" filter="fade">
+                                      <p:cBhvr>
+                                        <p:cTn id="7" dur="500"/>
+                                        <p:tgtEl>
+                                          <p:spTgt spid="4"/>
+                                        </p:tgtEl>
+                                      </p:cBhvr>
+                                    </p:animEffect>
+                                  </p:childTnLst>
+                                </p:cTn>
+                              </p:par>
+                              <p:par>
+                                <p:cTn id="8" presetID="10" presetClass="entr" presetSubtype="0" fill="hold" nodeType="withEffect">
+                                  <p:stCondLst>
+                                    <p:cond delay="300"/>
+                                  </p:stCondLst>
+                                  <p:childTnLst>
+                                    <p:set>
+                                      <p:cBhvr>
+                                        <p:cTn id="9" dur="1" fill="hold">
+                                          <p:stCondLst>
+                                            <p:cond delay="0"/>
+                                          </p:stCondLst>
+                                        </p:cTn>
+                                        <p:tgtEl>
+                                          <p:spTgt spid="65"/>
+                                        </p:tgtEl>
+                                        <p:attrNameLst>
+                                          <p:attrName>style.visibility</p:attrName>
+                                        </p:attrNameLst>
+                                      </p:cBhvr>
+                                      <p:to>
+                                        <p:strVal val="visible"/>
+                                      </p:to>
+                                    </p:set>
+                                    <p:animEffect transition="in" filter="fade">
+                                      <p:cBhvr>
+                                        <p:cTn id="10" dur="500"/>
+                                        <p:tgtEl>
+                                          <p:spTgt spid="65"/>
+                                        </p:tgtEl>
+                                      </p:cBhvr>
+                                    </p:animEffect>
+                                  </p:childTnLst>
+                                </p:cTn>
+                              </p:par>
+                              <p:par>
+                                <p:cTn id="11" presetID="10" presetClass="entr" presetSubtype="0" fill="hold" nodeType="withEffect">
+                                  <p:stCondLst>
+                                    <p:cond delay="600"/>
+                                  </p:stCondLst>
+                                  <p:childTnLst>
+                                    <p:set>
+                                      <p:cBhvr>
+                                        <p:cTn id="12" dur="1" fill="hold">
+                                          <p:stCondLst>
+                                            <p:cond delay="0"/>
+                                          </p:stCondLst>
+                                        </p:cTn>
+                                        <p:tgtEl>
+                                          <p:spTgt spid="66"/>
+                                        </p:tgtEl>
+                                        <p:attrNameLst>
+                                          <p:attrName>style.visibility</p:attrName>
+                                        </p:attrNameLst>
+                                      </p:cBhvr>
+                                      <p:to>
+                                        <p:strVal val="visible"/>
+                                      </p:to>
+                                    </p:set>
+                                    <p:animEffect transition="in" filter="fade">
+                                      <p:cBhvr>
+                                        <p:cTn id="13" dur="500"/>
+                                        <p:tgtEl>
+                                          <p:spTgt spid="66"/>
+                                        </p:tgtEl>
+                                      </p:cBhvr>
+                                    </p:animEffect>
+                                  </p:childTnLst>
+                                </p:cTn>
+                              </p:par>
+                              <p:par>
+                                <p:cTn id="14" presetID="10" presetClass="entr" presetSubtype="0" fill="hold" nodeType="withEffect">
+                                  <p:stCondLst>
+                                    <p:cond delay="900"/>
+                                  </p:stCondLst>
+                                  <p:childTnLst>
+                                    <p:set>
+                                      <p:cBhvr>
+                                        <p:cTn id="15" dur="1" fill="hold">
+                                          <p:stCondLst>
+                                            <p:cond delay="0"/>
+                                          </p:stCondLst>
+                                        </p:cTn>
+                                        <p:tgtEl>
+                                          <p:spTgt spid="67"/>
+                                        </p:tgtEl>
+                                        <p:attrNameLst>
+                                          <p:attrName>style.visibility</p:attrName>
+                                        </p:attrNameLst>
+                                      </p:cBhvr>
+                                      <p:to>
+                                        <p:strVal val="visible"/>
+                                      </p:to>
+                                    </p:set>
+                                    <p:animEffect transition="in" filter="fade">
+                                      <p:cBhvr>
+                                        <p:cTn id="16" dur="500"/>
+                                        <p:tgtEl>
+                                          <p:spTgt spid="67"/>
+                                        </p:tgtEl>
+                                      </p:cBhvr>
+                                    </p:animEffect>
+                                  </p:childTnLst>
+                                </p:cTn>
+                              </p:par>
+                              <p:par>
+                                <p:cTn id="17" presetID="10" presetClass="entr" presetSubtype="0" fill="hold" nodeType="withEffect">
+                                  <p:stCondLst>
+                                    <p:cond delay="1200"/>
+                                  </p:stCondLst>
+                                  <p:childTnLst>
+                                    <p:set>
+                                      <p:cBhvr>
+                                        <p:cTn id="18" dur="1" fill="hold">
+                                          <p:stCondLst>
+                                            <p:cond delay="0"/>
+                                          </p:stCondLst>
+                                        </p:cTn>
+                                        <p:tgtEl>
+                                          <p:spTgt spid="68"/>
+                                        </p:tgtEl>
+                                        <p:attrNameLst>
+                                          <p:attrName>style.visibility</p:attrName>
+                                        </p:attrNameLst>
+                                      </p:cBhvr>
+                                      <p:to>
+                                        <p:strVal val="visible"/>
+                                      </p:to>
+                                    </p:set>
+                                    <p:animEffect transition="in" filter="fade">
+                                      <p:cBhvr>
+                                        <p:cTn id="19" dur="500"/>
+                                        <p:tgtEl>
+                                          <p:spTgt spid="68"/>
+                                        </p:tgtEl>
+                                      </p:cBhvr>
+                                    </p:animEffect>
+                                  </p:childTnLst>
+                                </p:cTn>
+                              </p:par>
+                            </p:childTnLst>
+                          </p:cTn>
+                        </p:par>
+                      </p:childTnLst>
+                    </p:cTn>
+                  </p:par>
+                </p:childTnLst>
+              </p:cTn>
+              <p:prevCondLst>
+                <p:cond evt="onPrev" delay="0">
+                  <p:tgtEl>
+                    <p:sldTgt/>
+                  </p:tgtEl>
+                </p:cond>
+              </p:prevCondLst>
+              <p:nextCondLst>
+                <p:cond evt="onNext" delay="0">
+                  <p:tgtEl>
+                    <p:sldTgt/>
+                  </p:tgtEl>
+                </p:cond>
+              </p:nextCondLst>
+            </p:seq>
+          </p:childTnLst>
+        </p:cTn>
+      </p:par>
+    </p:tnLst>
+  </p:timing>
 </p:sld>
 </file>
 
@@ -16909,6 +18841,209 @@
   <p:clrMapOvr>
     <a:masterClrMapping/>
   </p:clrMapOvr>
+  <mc:AlternateContent xmlns:mc="http://schemas.openxmlformats.org/markup-compatibility/2006">
+    <mc:Choice xmlns:p14="http://schemas.microsoft.com/office/powerpoint/2010/main" Requires="p14">
+      <p:transition spd="med" p14:dur="700">
+        <p:fade/>
+      </p:transition>
+    </mc:Choice>
+    <mc:Fallback>
+      <p:transition spd="med">
+        <p:fade/>
+      </p:transition>
+    </mc:Fallback>
+  </mc:AlternateContent>
+  <p:timing>
+    <p:tnLst>
+      <p:par>
+        <p:cTn id="1" dur="indefinite" restart="never" nodeType="tmRoot">
+          <p:childTnLst>
+            <p:seq concurrent="1" nextAc="seek">
+              <p:cTn id="2" dur="indefinite" nodeType="mainSeq">
+                <p:childTnLst>
+                  <p:par>
+                    <p:cTn id="3" fill="hold">
+                      <p:stCondLst>
+                        <p:cond delay="indefinite"/>
+                        <p:cond evt="onBegin" delay="0">
+                          <p:tn val="2"/>
+                        </p:cond>
+                      </p:stCondLst>
+                      <p:childTnLst>
+                        <p:par>
+                          <p:cTn id="4" fill="hold">
+                            <p:stCondLst>
+                              <p:cond delay="0"/>
+                            </p:stCondLst>
+                            <p:childTnLst>
+                              <p:par>
+                                <p:cTn id="5" presetID="10" presetClass="entr" presetSubtype="0" fill="hold" nodeType="afterEffect">
+                                  <p:stCondLst>
+                                    <p:cond delay="0"/>
+                                  </p:stCondLst>
+                                  <p:childTnLst>
+                                    <p:set>
+                                      <p:cBhvr>
+                                        <p:cTn id="6" dur="1" fill="hold">
+                                          <p:stCondLst>
+                                            <p:cond delay="0"/>
+                                          </p:stCondLst>
+                                        </p:cTn>
+                                        <p:tgtEl>
+                                          <p:spTgt spid="4"/>
+                                        </p:tgtEl>
+                                        <p:attrNameLst>
+                                          <p:attrName>style.visibility</p:attrName>
+                                        </p:attrNameLst>
+                                      </p:cBhvr>
+                                      <p:to>
+                                        <p:strVal val="visible"/>
+                                      </p:to>
+                                    </p:set>
+                                    <p:animEffect transition="in" filter="fade">
+                                      <p:cBhvr>
+                                        <p:cTn id="7" dur="500"/>
+                                        <p:tgtEl>
+                                          <p:spTgt spid="4"/>
+                                        </p:tgtEl>
+                                      </p:cBhvr>
+                                    </p:animEffect>
+                                  </p:childTnLst>
+                                </p:cTn>
+                              </p:par>
+                              <p:par>
+                                <p:cTn id="8" presetID="10" presetClass="entr" presetSubtype="0" fill="hold" nodeType="withEffect">
+                                  <p:stCondLst>
+                                    <p:cond delay="300"/>
+                                  </p:stCondLst>
+                                  <p:childTnLst>
+                                    <p:set>
+                                      <p:cBhvr>
+                                        <p:cTn id="9" dur="1" fill="hold">
+                                          <p:stCondLst>
+                                            <p:cond delay="0"/>
+                                          </p:stCondLst>
+                                        </p:cTn>
+                                        <p:tgtEl>
+                                          <p:spTgt spid="20"/>
+                                        </p:tgtEl>
+                                        <p:attrNameLst>
+                                          <p:attrName>style.visibility</p:attrName>
+                                        </p:attrNameLst>
+                                      </p:cBhvr>
+                                      <p:to>
+                                        <p:strVal val="visible"/>
+                                      </p:to>
+                                    </p:set>
+                                    <p:animEffect transition="in" filter="fade">
+                                      <p:cBhvr>
+                                        <p:cTn id="10" dur="500"/>
+                                        <p:tgtEl>
+                                          <p:spTgt spid="20"/>
+                                        </p:tgtEl>
+                                      </p:cBhvr>
+                                    </p:animEffect>
+                                  </p:childTnLst>
+                                </p:cTn>
+                              </p:par>
+                              <p:par>
+                                <p:cTn id="11" presetID="10" presetClass="entr" presetSubtype="0" fill="hold" nodeType="withEffect">
+                                  <p:stCondLst>
+                                    <p:cond delay="600"/>
+                                  </p:stCondLst>
+                                  <p:childTnLst>
+                                    <p:set>
+                                      <p:cBhvr>
+                                        <p:cTn id="12" dur="1" fill="hold">
+                                          <p:stCondLst>
+                                            <p:cond delay="0"/>
+                                          </p:stCondLst>
+                                        </p:cTn>
+                                        <p:tgtEl>
+                                          <p:spTgt spid="21"/>
+                                        </p:tgtEl>
+                                        <p:attrNameLst>
+                                          <p:attrName>style.visibility</p:attrName>
+                                        </p:attrNameLst>
+                                      </p:cBhvr>
+                                      <p:to>
+                                        <p:strVal val="visible"/>
+                                      </p:to>
+                                    </p:set>
+                                    <p:animEffect transition="in" filter="fade">
+                                      <p:cBhvr>
+                                        <p:cTn id="13" dur="500"/>
+                                        <p:tgtEl>
+                                          <p:spTgt spid="21"/>
+                                        </p:tgtEl>
+                                      </p:cBhvr>
+                                    </p:animEffect>
+                                  </p:childTnLst>
+                                </p:cTn>
+                              </p:par>
+                              <p:par>
+                                <p:cTn id="14" presetID="10" presetClass="entr" presetSubtype="0" fill="hold" nodeType="withEffect">
+                                  <p:stCondLst>
+                                    <p:cond delay="900"/>
+                                  </p:stCondLst>
+                                  <p:childTnLst>
+                                    <p:set>
+                                      <p:cBhvr>
+                                        <p:cTn id="15" dur="1" fill="hold">
+                                          <p:stCondLst>
+                                            <p:cond delay="0"/>
+                                          </p:stCondLst>
+                                        </p:cTn>
+                                        <p:tgtEl>
+                                          <p:spTgt spid="22"/>
+                                        </p:tgtEl>
+                                        <p:attrNameLst>
+                                          <p:attrName>style.visibility</p:attrName>
+                                        </p:attrNameLst>
+                                      </p:cBhvr>
+                                      <p:to>
+                                        <p:strVal val="visible"/>
+                                      </p:to>
+                                    </p:set>
+                                    <p:animEffect transition="in" filter="fade">
+                                      <p:cBhvr>
+                                        <p:cTn id="16" dur="500"/>
+                                        <p:tgtEl>
+                                          <p:spTgt spid="22"/>
+                                        </p:tgtEl>
+                                      </p:cBhvr>
+                                    </p:animEffect>
+                                  </p:childTnLst>
+                                </p:cTn>
+                              </p:par>
+                            </p:childTnLst>
+                          </p:cTn>
+                        </p:par>
+                      </p:childTnLst>
+                    </p:cTn>
+                  </p:par>
+                </p:childTnLst>
+              </p:cTn>
+              <p:prevCondLst>
+                <p:cond evt="onPrev" delay="0">
+                  <p:tgtEl>
+                    <p:sldTgt/>
+                  </p:tgtEl>
+                </p:cond>
+              </p:prevCondLst>
+              <p:nextCondLst>
+                <p:cond evt="onNext" delay="0">
+                  <p:tgtEl>
+                    <p:sldTgt/>
+                  </p:tgtEl>
+                </p:cond>
+              </p:nextCondLst>
+            </p:seq>
+          </p:childTnLst>
+        </p:cTn>
+      </p:par>
+    </p:tnLst>
+  </p:timing>
 </p:sld>
 </file>
 
@@ -19387,6 +21522,244 @@
   <p:clrMapOvr>
     <a:masterClrMapping/>
   </p:clrMapOvr>
+  <mc:AlternateContent xmlns:mc="http://schemas.openxmlformats.org/markup-compatibility/2006">
+    <mc:Choice xmlns:p14="http://schemas.microsoft.com/office/powerpoint/2010/main" Requires="p14">
+      <p:transition spd="med" p14:dur="700">
+        <p:fade/>
+      </p:transition>
+    </mc:Choice>
+    <mc:Fallback>
+      <p:transition spd="med">
+        <p:fade/>
+      </p:transition>
+    </mc:Fallback>
+  </mc:AlternateContent>
+  <p:timing>
+    <p:tnLst>
+      <p:par>
+        <p:cTn id="1" dur="indefinite" restart="never" nodeType="tmRoot">
+          <p:childTnLst>
+            <p:seq concurrent="1" nextAc="seek">
+              <p:cTn id="2" dur="indefinite" nodeType="mainSeq">
+                <p:childTnLst>
+                  <p:par>
+                    <p:cTn id="3" fill="hold">
+                      <p:stCondLst>
+                        <p:cond delay="indefinite"/>
+                        <p:cond evt="onBegin" delay="0">
+                          <p:tn val="2"/>
+                        </p:cond>
+                      </p:stCondLst>
+                      <p:childTnLst>
+                        <p:par>
+                          <p:cTn id="4" fill="hold">
+                            <p:stCondLst>
+                              <p:cond delay="0"/>
+                            </p:stCondLst>
+                            <p:childTnLst>
+                              <p:par>
+                                <p:cTn id="5" presetID="10" presetClass="entr" presetSubtype="0" fill="hold" nodeType="afterEffect">
+                                  <p:stCondLst>
+                                    <p:cond delay="0"/>
+                                  </p:stCondLst>
+                                  <p:childTnLst>
+                                    <p:set>
+                                      <p:cBhvr>
+                                        <p:cTn id="6" dur="1" fill="hold">
+                                          <p:stCondLst>
+                                            <p:cond delay="0"/>
+                                          </p:stCondLst>
+                                        </p:cTn>
+                                        <p:tgtEl>
+                                          <p:spTgt spid="4"/>
+                                        </p:tgtEl>
+                                        <p:attrNameLst>
+                                          <p:attrName>style.visibility</p:attrName>
+                                        </p:attrNameLst>
+                                      </p:cBhvr>
+                                      <p:to>
+                                        <p:strVal val="visible"/>
+                                      </p:to>
+                                    </p:set>
+                                    <p:animEffect transition="in" filter="fade">
+                                      <p:cBhvr>
+                                        <p:cTn id="7" dur="500"/>
+                                        <p:tgtEl>
+                                          <p:spTgt spid="4"/>
+                                        </p:tgtEl>
+                                      </p:cBhvr>
+                                    </p:animEffect>
+                                  </p:childTnLst>
+                                </p:cTn>
+                              </p:par>
+                              <p:par>
+                                <p:cTn id="8" presetID="10" presetClass="entr" presetSubtype="0" fill="hold" nodeType="withEffect">
+                                  <p:stCondLst>
+                                    <p:cond delay="300"/>
+                                  </p:stCondLst>
+                                  <p:childTnLst>
+                                    <p:set>
+                                      <p:cBhvr>
+                                        <p:cTn id="9" dur="1" fill="hold">
+                                          <p:stCondLst>
+                                            <p:cond delay="0"/>
+                                          </p:stCondLst>
+                                        </p:cTn>
+                                        <p:tgtEl>
+                                          <p:spTgt spid="6"/>
+                                        </p:tgtEl>
+                                        <p:attrNameLst>
+                                          <p:attrName>style.visibility</p:attrName>
+                                        </p:attrNameLst>
+                                      </p:cBhvr>
+                                      <p:to>
+                                        <p:strVal val="visible"/>
+                                      </p:to>
+                                    </p:set>
+                                    <p:animEffect transition="in" filter="fade">
+                                      <p:cBhvr>
+                                        <p:cTn id="10" dur="500"/>
+                                        <p:tgtEl>
+                                          <p:spTgt spid="6"/>
+                                        </p:tgtEl>
+                                      </p:cBhvr>
+                                    </p:animEffect>
+                                  </p:childTnLst>
+                                </p:cTn>
+                              </p:par>
+                              <p:par>
+                                <p:cTn id="11" presetID="10" presetClass="entr" presetSubtype="0" fill="hold" nodeType="withEffect">
+                                  <p:stCondLst>
+                                    <p:cond delay="600"/>
+                                  </p:stCondLst>
+                                  <p:childTnLst>
+                                    <p:set>
+                                      <p:cBhvr>
+                                        <p:cTn id="12" dur="1" fill="hold">
+                                          <p:stCondLst>
+                                            <p:cond delay="0"/>
+                                          </p:stCondLst>
+                                        </p:cTn>
+                                        <p:tgtEl>
+                                          <p:spTgt spid="76"/>
+                                        </p:tgtEl>
+                                        <p:attrNameLst>
+                                          <p:attrName>style.visibility</p:attrName>
+                                        </p:attrNameLst>
+                                      </p:cBhvr>
+                                      <p:to>
+                                        <p:strVal val="visible"/>
+                                      </p:to>
+                                    </p:set>
+                                    <p:animEffect transition="in" filter="fade">
+                                      <p:cBhvr>
+                                        <p:cTn id="13" dur="500"/>
+                                        <p:tgtEl>
+                                          <p:spTgt spid="76"/>
+                                        </p:tgtEl>
+                                      </p:cBhvr>
+                                    </p:animEffect>
+                                  </p:childTnLst>
+                                </p:cTn>
+                              </p:par>
+                              <p:par>
+                                <p:cTn id="14" presetID="10" presetClass="entr" presetSubtype="0" fill="hold" nodeType="withEffect">
+                                  <p:stCondLst>
+                                    <p:cond delay="900"/>
+                                  </p:stCondLst>
+                                  <p:childTnLst>
+                                    <p:set>
+                                      <p:cBhvr>
+                                        <p:cTn id="15" dur="1" fill="hold">
+                                          <p:stCondLst>
+                                            <p:cond delay="0"/>
+                                          </p:stCondLst>
+                                        </p:cTn>
+                                        <p:tgtEl>
+                                          <p:spTgt spid="77"/>
+                                        </p:tgtEl>
+                                        <p:attrNameLst>
+                                          <p:attrName>style.visibility</p:attrName>
+                                        </p:attrNameLst>
+                                      </p:cBhvr>
+                                      <p:to>
+                                        <p:strVal val="visible"/>
+                                      </p:to>
+                                    </p:set>
+                                    <p:animEffect transition="in" filter="fade">
+                                      <p:cBhvr>
+                                        <p:cTn id="16" dur="500"/>
+                                        <p:tgtEl>
+                                          <p:spTgt spid="77"/>
+                                        </p:tgtEl>
+                                      </p:cBhvr>
+                                    </p:animEffect>
+                                  </p:childTnLst>
+                                </p:cTn>
+                              </p:par>
+                              <p:par>
+                                <p:cTn id="17" presetID="10" presetClass="entr" presetSubtype="0" fill="hold" nodeType="withEffect">
+                                  <p:stCondLst>
+                                    <p:cond delay="1200"/>
+                                  </p:stCondLst>
+                                  <p:childTnLst>
+                                    <p:set>
+                                      <p:cBhvr>
+                                        <p:cTn id="18" dur="1" fill="hold">
+                                          <p:stCondLst>
+                                            <p:cond delay="0"/>
+                                          </p:stCondLst>
+                                        </p:cTn>
+                                        <p:tgtEl>
+                                          <p:spTgt spid="78"/>
+                                        </p:tgtEl>
+                                        <p:attrNameLst>
+                                          <p:attrName>style.visibility</p:attrName>
+                                        </p:attrNameLst>
+                                      </p:cBhvr>
+                                      <p:to>
+                                        <p:strVal val="visible"/>
+                                      </p:to>
+                                    </p:set>
+                                    <p:animEffect transition="in" filter="fade">
+                                      <p:cBhvr>
+                                        <p:cTn id="19" dur="500"/>
+                                        <p:tgtEl>
+                                          <p:spTgt spid="78"/>
+                                        </p:tgtEl>
+                                      </p:cBhvr>
+                                    </p:animEffect>
+                                  </p:childTnLst>
+                                </p:cTn>
+                              </p:par>
+                            </p:childTnLst>
+                          </p:cTn>
+                        </p:par>
+                      </p:childTnLst>
+                    </p:cTn>
+                  </p:par>
+                </p:childTnLst>
+              </p:cTn>
+              <p:prevCondLst>
+                <p:cond evt="onPrev" delay="0">
+                  <p:tgtEl>
+                    <p:sldTgt/>
+                  </p:tgtEl>
+                </p:cond>
+              </p:prevCondLst>
+              <p:nextCondLst>
+                <p:cond evt="onNext" delay="0">
+                  <p:tgtEl>
+                    <p:sldTgt/>
+                  </p:tgtEl>
+                </p:cond>
+              </p:nextCondLst>
+            </p:seq>
+          </p:childTnLst>
+        </p:cTn>
+      </p:par>
+    </p:tnLst>
+  </p:timing>
 </p:sld>
 </file>
 
@@ -20197,6 +22570,244 @@
   <p:clrMapOvr>
     <a:masterClrMapping/>
   </p:clrMapOvr>
+  <mc:AlternateContent xmlns:mc="http://schemas.openxmlformats.org/markup-compatibility/2006">
+    <mc:Choice xmlns:p14="http://schemas.microsoft.com/office/powerpoint/2010/main" Requires="p14">
+      <p:transition spd="med" p14:dur="700">
+        <p:fade/>
+      </p:transition>
+    </mc:Choice>
+    <mc:Fallback>
+      <p:transition spd="med">
+        <p:fade/>
+      </p:transition>
+    </mc:Fallback>
+  </mc:AlternateContent>
+  <p:timing>
+    <p:tnLst>
+      <p:par>
+        <p:cTn id="1" dur="indefinite" restart="never" nodeType="tmRoot">
+          <p:childTnLst>
+            <p:seq concurrent="1" nextAc="seek">
+              <p:cTn id="2" dur="indefinite" nodeType="mainSeq">
+                <p:childTnLst>
+                  <p:par>
+                    <p:cTn id="3" fill="hold">
+                      <p:stCondLst>
+                        <p:cond delay="indefinite"/>
+                        <p:cond evt="onBegin" delay="0">
+                          <p:tn val="2"/>
+                        </p:cond>
+                      </p:stCondLst>
+                      <p:childTnLst>
+                        <p:par>
+                          <p:cTn id="4" fill="hold">
+                            <p:stCondLst>
+                              <p:cond delay="0"/>
+                            </p:stCondLst>
+                            <p:childTnLst>
+                              <p:par>
+                                <p:cTn id="5" presetID="10" presetClass="entr" presetSubtype="0" fill="hold" nodeType="afterEffect">
+                                  <p:stCondLst>
+                                    <p:cond delay="0"/>
+                                  </p:stCondLst>
+                                  <p:childTnLst>
+                                    <p:set>
+                                      <p:cBhvr>
+                                        <p:cTn id="6" dur="1" fill="hold">
+                                          <p:stCondLst>
+                                            <p:cond delay="0"/>
+                                          </p:stCondLst>
+                                        </p:cTn>
+                                        <p:tgtEl>
+                                          <p:spTgt spid="3"/>
+                                        </p:tgtEl>
+                                        <p:attrNameLst>
+                                          <p:attrName>style.visibility</p:attrName>
+                                        </p:attrNameLst>
+                                      </p:cBhvr>
+                                      <p:to>
+                                        <p:strVal val="visible"/>
+                                      </p:to>
+                                    </p:set>
+                                    <p:animEffect transition="in" filter="fade">
+                                      <p:cBhvr>
+                                        <p:cTn id="7" dur="500"/>
+                                        <p:tgtEl>
+                                          <p:spTgt spid="3"/>
+                                        </p:tgtEl>
+                                      </p:cBhvr>
+                                    </p:animEffect>
+                                  </p:childTnLst>
+                                </p:cTn>
+                              </p:par>
+                              <p:par>
+                                <p:cTn id="8" presetID="10" presetClass="entr" presetSubtype="0" fill="hold" nodeType="withEffect">
+                                  <p:stCondLst>
+                                    <p:cond delay="300"/>
+                                  </p:stCondLst>
+                                  <p:childTnLst>
+                                    <p:set>
+                                      <p:cBhvr>
+                                        <p:cTn id="9" dur="1" fill="hold">
+                                          <p:stCondLst>
+                                            <p:cond delay="0"/>
+                                          </p:stCondLst>
+                                        </p:cTn>
+                                        <p:tgtEl>
+                                          <p:spTgt spid="15"/>
+                                        </p:tgtEl>
+                                        <p:attrNameLst>
+                                          <p:attrName>style.visibility</p:attrName>
+                                        </p:attrNameLst>
+                                      </p:cBhvr>
+                                      <p:to>
+                                        <p:strVal val="visible"/>
+                                      </p:to>
+                                    </p:set>
+                                    <p:animEffect transition="in" filter="fade">
+                                      <p:cBhvr>
+                                        <p:cTn id="10" dur="500"/>
+                                        <p:tgtEl>
+                                          <p:spTgt spid="15"/>
+                                        </p:tgtEl>
+                                      </p:cBhvr>
+                                    </p:animEffect>
+                                  </p:childTnLst>
+                                </p:cTn>
+                              </p:par>
+                              <p:par>
+                                <p:cTn id="11" presetID="10" presetClass="entr" presetSubtype="0" fill="hold" nodeType="withEffect">
+                                  <p:stCondLst>
+                                    <p:cond delay="600"/>
+                                  </p:stCondLst>
+                                  <p:childTnLst>
+                                    <p:set>
+                                      <p:cBhvr>
+                                        <p:cTn id="12" dur="1" fill="hold">
+                                          <p:stCondLst>
+                                            <p:cond delay="0"/>
+                                          </p:stCondLst>
+                                        </p:cTn>
+                                        <p:tgtEl>
+                                          <p:spTgt spid="22"/>
+                                        </p:tgtEl>
+                                        <p:attrNameLst>
+                                          <p:attrName>style.visibility</p:attrName>
+                                        </p:attrNameLst>
+                                      </p:cBhvr>
+                                      <p:to>
+                                        <p:strVal val="visible"/>
+                                      </p:to>
+                                    </p:set>
+                                    <p:animEffect transition="in" filter="fade">
+                                      <p:cBhvr>
+                                        <p:cTn id="13" dur="500"/>
+                                        <p:tgtEl>
+                                          <p:spTgt spid="22"/>
+                                        </p:tgtEl>
+                                      </p:cBhvr>
+                                    </p:animEffect>
+                                  </p:childTnLst>
+                                </p:cTn>
+                              </p:par>
+                              <p:par>
+                                <p:cTn id="14" presetID="10" presetClass="entr" presetSubtype="0" fill="hold" nodeType="withEffect">
+                                  <p:stCondLst>
+                                    <p:cond delay="900"/>
+                                  </p:stCondLst>
+                                  <p:childTnLst>
+                                    <p:set>
+                                      <p:cBhvr>
+                                        <p:cTn id="15" dur="1" fill="hold">
+                                          <p:stCondLst>
+                                            <p:cond delay="0"/>
+                                          </p:stCondLst>
+                                        </p:cTn>
+                                        <p:tgtEl>
+                                          <p:spTgt spid="23"/>
+                                        </p:tgtEl>
+                                        <p:attrNameLst>
+                                          <p:attrName>style.visibility</p:attrName>
+                                        </p:attrNameLst>
+                                      </p:cBhvr>
+                                      <p:to>
+                                        <p:strVal val="visible"/>
+                                      </p:to>
+                                    </p:set>
+                                    <p:animEffect transition="in" filter="fade">
+                                      <p:cBhvr>
+                                        <p:cTn id="16" dur="500"/>
+                                        <p:tgtEl>
+                                          <p:spTgt spid="23"/>
+                                        </p:tgtEl>
+                                      </p:cBhvr>
+                                    </p:animEffect>
+                                  </p:childTnLst>
+                                </p:cTn>
+                              </p:par>
+                              <p:par>
+                                <p:cTn id="17" presetID="10" presetClass="entr" presetSubtype="0" fill="hold" nodeType="withEffect">
+                                  <p:stCondLst>
+                                    <p:cond delay="1200"/>
+                                  </p:stCondLst>
+                                  <p:childTnLst>
+                                    <p:set>
+                                      <p:cBhvr>
+                                        <p:cTn id="18" dur="1" fill="hold">
+                                          <p:stCondLst>
+                                            <p:cond delay="0"/>
+                                          </p:stCondLst>
+                                        </p:cTn>
+                                        <p:tgtEl>
+                                          <p:spTgt spid="24"/>
+                                        </p:tgtEl>
+                                        <p:attrNameLst>
+                                          <p:attrName>style.visibility</p:attrName>
+                                        </p:attrNameLst>
+                                      </p:cBhvr>
+                                      <p:to>
+                                        <p:strVal val="visible"/>
+                                      </p:to>
+                                    </p:set>
+                                    <p:animEffect transition="in" filter="fade">
+                                      <p:cBhvr>
+                                        <p:cTn id="19" dur="500"/>
+                                        <p:tgtEl>
+                                          <p:spTgt spid="24"/>
+                                        </p:tgtEl>
+                                      </p:cBhvr>
+                                    </p:animEffect>
+                                  </p:childTnLst>
+                                </p:cTn>
+                              </p:par>
+                            </p:childTnLst>
+                          </p:cTn>
+                        </p:par>
+                      </p:childTnLst>
+                    </p:cTn>
+                  </p:par>
+                </p:childTnLst>
+              </p:cTn>
+              <p:prevCondLst>
+                <p:cond evt="onPrev" delay="0">
+                  <p:tgtEl>
+                    <p:sldTgt/>
+                  </p:tgtEl>
+                </p:cond>
+              </p:prevCondLst>
+              <p:nextCondLst>
+                <p:cond evt="onNext" delay="0">
+                  <p:tgtEl>
+                    <p:sldTgt/>
+                  </p:tgtEl>
+                </p:cond>
+              </p:nextCondLst>
+            </p:seq>
+          </p:childTnLst>
+        </p:cTn>
+      </p:par>
+    </p:tnLst>
+  </p:timing>
 </p:sld>
 </file>
 
@@ -23478,6 +26089,209 @@
   <p:clrMapOvr>
     <a:masterClrMapping/>
   </p:clrMapOvr>
+  <mc:AlternateContent xmlns:mc="http://schemas.openxmlformats.org/markup-compatibility/2006">
+    <mc:Choice xmlns:p14="http://schemas.microsoft.com/office/powerpoint/2010/main" Requires="p14">
+      <p:transition spd="med" p14:dur="700">
+        <p:fade/>
+      </p:transition>
+    </mc:Choice>
+    <mc:Fallback>
+      <p:transition spd="med">
+        <p:fade/>
+      </p:transition>
+    </mc:Fallback>
+  </mc:AlternateContent>
+  <p:timing>
+    <p:tnLst>
+      <p:par>
+        <p:cTn id="1" dur="indefinite" restart="never" nodeType="tmRoot">
+          <p:childTnLst>
+            <p:seq concurrent="1" nextAc="seek">
+              <p:cTn id="2" dur="indefinite" nodeType="mainSeq">
+                <p:childTnLst>
+                  <p:par>
+                    <p:cTn id="3" fill="hold">
+                      <p:stCondLst>
+                        <p:cond delay="indefinite"/>
+                        <p:cond evt="onBegin" delay="0">
+                          <p:tn val="2"/>
+                        </p:cond>
+                      </p:stCondLst>
+                      <p:childTnLst>
+                        <p:par>
+                          <p:cTn id="4" fill="hold">
+                            <p:stCondLst>
+                              <p:cond delay="0"/>
+                            </p:stCondLst>
+                            <p:childTnLst>
+                              <p:par>
+                                <p:cTn id="5" presetID="10" presetClass="entr" presetSubtype="0" fill="hold" nodeType="afterEffect">
+                                  <p:stCondLst>
+                                    <p:cond delay="0"/>
+                                  </p:stCondLst>
+                                  <p:childTnLst>
+                                    <p:set>
+                                      <p:cBhvr>
+                                        <p:cTn id="6" dur="1" fill="hold">
+                                          <p:stCondLst>
+                                            <p:cond delay="0"/>
+                                          </p:stCondLst>
+                                        </p:cTn>
+                                        <p:tgtEl>
+                                          <p:spTgt spid="4"/>
+                                        </p:tgtEl>
+                                        <p:attrNameLst>
+                                          <p:attrName>style.visibility</p:attrName>
+                                        </p:attrNameLst>
+                                      </p:cBhvr>
+                                      <p:to>
+                                        <p:strVal val="visible"/>
+                                      </p:to>
+                                    </p:set>
+                                    <p:animEffect transition="in" filter="fade">
+                                      <p:cBhvr>
+                                        <p:cTn id="7" dur="500"/>
+                                        <p:tgtEl>
+                                          <p:spTgt spid="4"/>
+                                        </p:tgtEl>
+                                      </p:cBhvr>
+                                    </p:animEffect>
+                                  </p:childTnLst>
+                                </p:cTn>
+                              </p:par>
+                              <p:par>
+                                <p:cTn id="8" presetID="10" presetClass="entr" presetSubtype="0" fill="hold" nodeType="withEffect">
+                                  <p:stCondLst>
+                                    <p:cond delay="300"/>
+                                  </p:stCondLst>
+                                  <p:childTnLst>
+                                    <p:set>
+                                      <p:cBhvr>
+                                        <p:cTn id="9" dur="1" fill="hold">
+                                          <p:stCondLst>
+                                            <p:cond delay="0"/>
+                                          </p:stCondLst>
+                                        </p:cTn>
+                                        <p:tgtEl>
+                                          <p:spTgt spid="103"/>
+                                        </p:tgtEl>
+                                        <p:attrNameLst>
+                                          <p:attrName>style.visibility</p:attrName>
+                                        </p:attrNameLst>
+                                      </p:cBhvr>
+                                      <p:to>
+                                        <p:strVal val="visible"/>
+                                      </p:to>
+                                    </p:set>
+                                    <p:animEffect transition="in" filter="fade">
+                                      <p:cBhvr>
+                                        <p:cTn id="10" dur="500"/>
+                                        <p:tgtEl>
+                                          <p:spTgt spid="103"/>
+                                        </p:tgtEl>
+                                      </p:cBhvr>
+                                    </p:animEffect>
+                                  </p:childTnLst>
+                                </p:cTn>
+                              </p:par>
+                              <p:par>
+                                <p:cTn id="11" presetID="10" presetClass="entr" presetSubtype="0" fill="hold" nodeType="withEffect">
+                                  <p:stCondLst>
+                                    <p:cond delay="600"/>
+                                  </p:stCondLst>
+                                  <p:childTnLst>
+                                    <p:set>
+                                      <p:cBhvr>
+                                        <p:cTn id="12" dur="1" fill="hold">
+                                          <p:stCondLst>
+                                            <p:cond delay="0"/>
+                                          </p:stCondLst>
+                                        </p:cTn>
+                                        <p:tgtEl>
+                                          <p:spTgt spid="104"/>
+                                        </p:tgtEl>
+                                        <p:attrNameLst>
+                                          <p:attrName>style.visibility</p:attrName>
+                                        </p:attrNameLst>
+                                      </p:cBhvr>
+                                      <p:to>
+                                        <p:strVal val="visible"/>
+                                      </p:to>
+                                    </p:set>
+                                    <p:animEffect transition="in" filter="fade">
+                                      <p:cBhvr>
+                                        <p:cTn id="13" dur="500"/>
+                                        <p:tgtEl>
+                                          <p:spTgt spid="104"/>
+                                        </p:tgtEl>
+                                      </p:cBhvr>
+                                    </p:animEffect>
+                                  </p:childTnLst>
+                                </p:cTn>
+                              </p:par>
+                              <p:par>
+                                <p:cTn id="14" presetID="10" presetClass="entr" presetSubtype="0" fill="hold" nodeType="withEffect">
+                                  <p:stCondLst>
+                                    <p:cond delay="900"/>
+                                  </p:stCondLst>
+                                  <p:childTnLst>
+                                    <p:set>
+                                      <p:cBhvr>
+                                        <p:cTn id="15" dur="1" fill="hold">
+                                          <p:stCondLst>
+                                            <p:cond delay="0"/>
+                                          </p:stCondLst>
+                                        </p:cTn>
+                                        <p:tgtEl>
+                                          <p:spTgt spid="105"/>
+                                        </p:tgtEl>
+                                        <p:attrNameLst>
+                                          <p:attrName>style.visibility</p:attrName>
+                                        </p:attrNameLst>
+                                      </p:cBhvr>
+                                      <p:to>
+                                        <p:strVal val="visible"/>
+                                      </p:to>
+                                    </p:set>
+                                    <p:animEffect transition="in" filter="fade">
+                                      <p:cBhvr>
+                                        <p:cTn id="16" dur="500"/>
+                                        <p:tgtEl>
+                                          <p:spTgt spid="105"/>
+                                        </p:tgtEl>
+                                      </p:cBhvr>
+                                    </p:animEffect>
+                                  </p:childTnLst>
+                                </p:cTn>
+                              </p:par>
+                            </p:childTnLst>
+                          </p:cTn>
+                        </p:par>
+                      </p:childTnLst>
+                    </p:cTn>
+                  </p:par>
+                </p:childTnLst>
+              </p:cTn>
+              <p:prevCondLst>
+                <p:cond evt="onPrev" delay="0">
+                  <p:tgtEl>
+                    <p:sldTgt/>
+                  </p:tgtEl>
+                </p:cond>
+              </p:prevCondLst>
+              <p:nextCondLst>
+                <p:cond evt="onNext" delay="0">
+                  <p:tgtEl>
+                    <p:sldTgt/>
+                  </p:tgtEl>
+                </p:cond>
+              </p:nextCondLst>
+            </p:seq>
+          </p:childTnLst>
+        </p:cTn>
+      </p:par>
+    </p:tnLst>
+  </p:timing>
 </p:sld>
 </file>
 
@@ -26342,6 +29156,209 @@
   <p:clrMapOvr>
     <a:masterClrMapping/>
   </p:clrMapOvr>
+  <mc:AlternateContent xmlns:mc="http://schemas.openxmlformats.org/markup-compatibility/2006">
+    <mc:Choice xmlns:p14="http://schemas.microsoft.com/office/powerpoint/2010/main" Requires="p14">
+      <p:transition spd="med" p14:dur="700">
+        <p:fade/>
+      </p:transition>
+    </mc:Choice>
+    <mc:Fallback>
+      <p:transition spd="med">
+        <p:fade/>
+      </p:transition>
+    </mc:Fallback>
+  </mc:AlternateContent>
+  <p:timing>
+    <p:tnLst>
+      <p:par>
+        <p:cTn id="1" dur="indefinite" restart="never" nodeType="tmRoot">
+          <p:childTnLst>
+            <p:seq concurrent="1" nextAc="seek">
+              <p:cTn id="2" dur="indefinite" nodeType="mainSeq">
+                <p:childTnLst>
+                  <p:par>
+                    <p:cTn id="3" fill="hold">
+                      <p:stCondLst>
+                        <p:cond delay="indefinite"/>
+                        <p:cond evt="onBegin" delay="0">
+                          <p:tn val="2"/>
+                        </p:cond>
+                      </p:stCondLst>
+                      <p:childTnLst>
+                        <p:par>
+                          <p:cTn id="4" fill="hold">
+                            <p:stCondLst>
+                              <p:cond delay="0"/>
+                            </p:stCondLst>
+                            <p:childTnLst>
+                              <p:par>
+                                <p:cTn id="5" presetID="10" presetClass="entr" presetSubtype="0" fill="hold" nodeType="afterEffect">
+                                  <p:stCondLst>
+                                    <p:cond delay="0"/>
+                                  </p:stCondLst>
+                                  <p:childTnLst>
+                                    <p:set>
+                                      <p:cBhvr>
+                                        <p:cTn id="6" dur="1" fill="hold">
+                                          <p:stCondLst>
+                                            <p:cond delay="0"/>
+                                          </p:stCondLst>
+                                        </p:cTn>
+                                        <p:tgtEl>
+                                          <p:spTgt spid="4"/>
+                                        </p:tgtEl>
+                                        <p:attrNameLst>
+                                          <p:attrName>style.visibility</p:attrName>
+                                        </p:attrNameLst>
+                                      </p:cBhvr>
+                                      <p:to>
+                                        <p:strVal val="visible"/>
+                                      </p:to>
+                                    </p:set>
+                                    <p:animEffect transition="in" filter="fade">
+                                      <p:cBhvr>
+                                        <p:cTn id="7" dur="500"/>
+                                        <p:tgtEl>
+                                          <p:spTgt spid="4"/>
+                                        </p:tgtEl>
+                                      </p:cBhvr>
+                                    </p:animEffect>
+                                  </p:childTnLst>
+                                </p:cTn>
+                              </p:par>
+                              <p:par>
+                                <p:cTn id="8" presetID="10" presetClass="entr" presetSubtype="0" fill="hold" nodeType="withEffect">
+                                  <p:stCondLst>
+                                    <p:cond delay="300"/>
+                                  </p:stCondLst>
+                                  <p:childTnLst>
+                                    <p:set>
+                                      <p:cBhvr>
+                                        <p:cTn id="9" dur="1" fill="hold">
+                                          <p:stCondLst>
+                                            <p:cond delay="0"/>
+                                          </p:stCondLst>
+                                        </p:cTn>
+                                        <p:tgtEl>
+                                          <p:spTgt spid="83"/>
+                                        </p:tgtEl>
+                                        <p:attrNameLst>
+                                          <p:attrName>style.visibility</p:attrName>
+                                        </p:attrNameLst>
+                                      </p:cBhvr>
+                                      <p:to>
+                                        <p:strVal val="visible"/>
+                                      </p:to>
+                                    </p:set>
+                                    <p:animEffect transition="in" filter="fade">
+                                      <p:cBhvr>
+                                        <p:cTn id="10" dur="500"/>
+                                        <p:tgtEl>
+                                          <p:spTgt spid="83"/>
+                                        </p:tgtEl>
+                                      </p:cBhvr>
+                                    </p:animEffect>
+                                  </p:childTnLst>
+                                </p:cTn>
+                              </p:par>
+                              <p:par>
+                                <p:cTn id="11" presetID="10" presetClass="entr" presetSubtype="0" fill="hold" nodeType="withEffect">
+                                  <p:stCondLst>
+                                    <p:cond delay="600"/>
+                                  </p:stCondLst>
+                                  <p:childTnLst>
+                                    <p:set>
+                                      <p:cBhvr>
+                                        <p:cTn id="12" dur="1" fill="hold">
+                                          <p:stCondLst>
+                                            <p:cond delay="0"/>
+                                          </p:stCondLst>
+                                        </p:cTn>
+                                        <p:tgtEl>
+                                          <p:spTgt spid="84"/>
+                                        </p:tgtEl>
+                                        <p:attrNameLst>
+                                          <p:attrName>style.visibility</p:attrName>
+                                        </p:attrNameLst>
+                                      </p:cBhvr>
+                                      <p:to>
+                                        <p:strVal val="visible"/>
+                                      </p:to>
+                                    </p:set>
+                                    <p:animEffect transition="in" filter="fade">
+                                      <p:cBhvr>
+                                        <p:cTn id="13" dur="500"/>
+                                        <p:tgtEl>
+                                          <p:spTgt spid="84"/>
+                                        </p:tgtEl>
+                                      </p:cBhvr>
+                                    </p:animEffect>
+                                  </p:childTnLst>
+                                </p:cTn>
+                              </p:par>
+                              <p:par>
+                                <p:cTn id="14" presetID="10" presetClass="entr" presetSubtype="0" fill="hold" nodeType="withEffect">
+                                  <p:stCondLst>
+                                    <p:cond delay="900"/>
+                                  </p:stCondLst>
+                                  <p:childTnLst>
+                                    <p:set>
+                                      <p:cBhvr>
+                                        <p:cTn id="15" dur="1" fill="hold">
+                                          <p:stCondLst>
+                                            <p:cond delay="0"/>
+                                          </p:stCondLst>
+                                        </p:cTn>
+                                        <p:tgtEl>
+                                          <p:spTgt spid="85"/>
+                                        </p:tgtEl>
+                                        <p:attrNameLst>
+                                          <p:attrName>style.visibility</p:attrName>
+                                        </p:attrNameLst>
+                                      </p:cBhvr>
+                                      <p:to>
+                                        <p:strVal val="visible"/>
+                                      </p:to>
+                                    </p:set>
+                                    <p:animEffect transition="in" filter="fade">
+                                      <p:cBhvr>
+                                        <p:cTn id="16" dur="500"/>
+                                        <p:tgtEl>
+                                          <p:spTgt spid="85"/>
+                                        </p:tgtEl>
+                                      </p:cBhvr>
+                                    </p:animEffect>
+                                  </p:childTnLst>
+                                </p:cTn>
+                              </p:par>
+                            </p:childTnLst>
+                          </p:cTn>
+                        </p:par>
+                      </p:childTnLst>
+                    </p:cTn>
+                  </p:par>
+                </p:childTnLst>
+              </p:cTn>
+              <p:prevCondLst>
+                <p:cond evt="onPrev" delay="0">
+                  <p:tgtEl>
+                    <p:sldTgt/>
+                  </p:tgtEl>
+                </p:cond>
+              </p:prevCondLst>
+              <p:nextCondLst>
+                <p:cond evt="onNext" delay="0">
+                  <p:tgtEl>
+                    <p:sldTgt/>
+                  </p:tgtEl>
+                </p:cond>
+              </p:nextCondLst>
+            </p:seq>
+          </p:childTnLst>
+        </p:cTn>
+      </p:par>
+    </p:tnLst>
+  </p:timing>
 </p:sld>
 </file>
 
@@ -27150,6 +30167,244 @@
   <p:clrMapOvr>
     <a:masterClrMapping/>
   </p:clrMapOvr>
+  <mc:AlternateContent xmlns:mc="http://schemas.openxmlformats.org/markup-compatibility/2006">
+    <mc:Choice xmlns:p14="http://schemas.microsoft.com/office/powerpoint/2010/main" Requires="p14">
+      <p:transition spd="med" p14:dur="700">
+        <p:fade/>
+      </p:transition>
+    </mc:Choice>
+    <mc:Fallback>
+      <p:transition spd="med">
+        <p:fade/>
+      </p:transition>
+    </mc:Fallback>
+  </mc:AlternateContent>
+  <p:timing>
+    <p:tnLst>
+      <p:par>
+        <p:cTn id="1" dur="indefinite" restart="never" nodeType="tmRoot">
+          <p:childTnLst>
+            <p:seq concurrent="1" nextAc="seek">
+              <p:cTn id="2" dur="indefinite" nodeType="mainSeq">
+                <p:childTnLst>
+                  <p:par>
+                    <p:cTn id="3" fill="hold">
+                      <p:stCondLst>
+                        <p:cond delay="indefinite"/>
+                        <p:cond evt="onBegin" delay="0">
+                          <p:tn val="2"/>
+                        </p:cond>
+                      </p:stCondLst>
+                      <p:childTnLst>
+                        <p:par>
+                          <p:cTn id="4" fill="hold">
+                            <p:stCondLst>
+                              <p:cond delay="0"/>
+                            </p:stCondLst>
+                            <p:childTnLst>
+                              <p:par>
+                                <p:cTn id="5" presetID="10" presetClass="entr" presetSubtype="0" fill="hold" nodeType="afterEffect">
+                                  <p:stCondLst>
+                                    <p:cond delay="0"/>
+                                  </p:stCondLst>
+                                  <p:childTnLst>
+                                    <p:set>
+                                      <p:cBhvr>
+                                        <p:cTn id="6" dur="1" fill="hold">
+                                          <p:stCondLst>
+                                            <p:cond delay="0"/>
+                                          </p:stCondLst>
+                                        </p:cTn>
+                                        <p:tgtEl>
+                                          <p:spTgt spid="4"/>
+                                        </p:tgtEl>
+                                        <p:attrNameLst>
+                                          <p:attrName>style.visibility</p:attrName>
+                                        </p:attrNameLst>
+                                      </p:cBhvr>
+                                      <p:to>
+                                        <p:strVal val="visible"/>
+                                      </p:to>
+                                    </p:set>
+                                    <p:animEffect transition="in" filter="fade">
+                                      <p:cBhvr>
+                                        <p:cTn id="7" dur="500"/>
+                                        <p:tgtEl>
+                                          <p:spTgt spid="4"/>
+                                        </p:tgtEl>
+                                      </p:cBhvr>
+                                    </p:animEffect>
+                                  </p:childTnLst>
+                                </p:cTn>
+                              </p:par>
+                              <p:par>
+                                <p:cTn id="8" presetID="10" presetClass="entr" presetSubtype="0" fill="hold" nodeType="withEffect">
+                                  <p:stCondLst>
+                                    <p:cond delay="300"/>
+                                  </p:stCondLst>
+                                  <p:childTnLst>
+                                    <p:set>
+                                      <p:cBhvr>
+                                        <p:cTn id="9" dur="1" fill="hold">
+                                          <p:stCondLst>
+                                            <p:cond delay="0"/>
+                                          </p:stCondLst>
+                                        </p:cTn>
+                                        <p:tgtEl>
+                                          <p:spTgt spid="6"/>
+                                        </p:tgtEl>
+                                        <p:attrNameLst>
+                                          <p:attrName>style.visibility</p:attrName>
+                                        </p:attrNameLst>
+                                      </p:cBhvr>
+                                      <p:to>
+                                        <p:strVal val="visible"/>
+                                      </p:to>
+                                    </p:set>
+                                    <p:animEffect transition="in" filter="fade">
+                                      <p:cBhvr>
+                                        <p:cTn id="10" dur="500"/>
+                                        <p:tgtEl>
+                                          <p:spTgt spid="6"/>
+                                        </p:tgtEl>
+                                      </p:cBhvr>
+                                    </p:animEffect>
+                                  </p:childTnLst>
+                                </p:cTn>
+                              </p:par>
+                              <p:par>
+                                <p:cTn id="11" presetID="10" presetClass="entr" presetSubtype="0" fill="hold" nodeType="withEffect">
+                                  <p:stCondLst>
+                                    <p:cond delay="600"/>
+                                  </p:stCondLst>
+                                  <p:childTnLst>
+                                    <p:set>
+                                      <p:cBhvr>
+                                        <p:cTn id="12" dur="1" fill="hold">
+                                          <p:stCondLst>
+                                            <p:cond delay="0"/>
+                                          </p:stCondLst>
+                                        </p:cTn>
+                                        <p:tgtEl>
+                                          <p:spTgt spid="19"/>
+                                        </p:tgtEl>
+                                        <p:attrNameLst>
+                                          <p:attrName>style.visibility</p:attrName>
+                                        </p:attrNameLst>
+                                      </p:cBhvr>
+                                      <p:to>
+                                        <p:strVal val="visible"/>
+                                      </p:to>
+                                    </p:set>
+                                    <p:animEffect transition="in" filter="fade">
+                                      <p:cBhvr>
+                                        <p:cTn id="13" dur="500"/>
+                                        <p:tgtEl>
+                                          <p:spTgt spid="19"/>
+                                        </p:tgtEl>
+                                      </p:cBhvr>
+                                    </p:animEffect>
+                                  </p:childTnLst>
+                                </p:cTn>
+                              </p:par>
+                              <p:par>
+                                <p:cTn id="14" presetID="10" presetClass="entr" presetSubtype="0" fill="hold" nodeType="withEffect">
+                                  <p:stCondLst>
+                                    <p:cond delay="900"/>
+                                  </p:stCondLst>
+                                  <p:childTnLst>
+                                    <p:set>
+                                      <p:cBhvr>
+                                        <p:cTn id="15" dur="1" fill="hold">
+                                          <p:stCondLst>
+                                            <p:cond delay="0"/>
+                                          </p:stCondLst>
+                                        </p:cTn>
+                                        <p:tgtEl>
+                                          <p:spTgt spid="20"/>
+                                        </p:tgtEl>
+                                        <p:attrNameLst>
+                                          <p:attrName>style.visibility</p:attrName>
+                                        </p:attrNameLst>
+                                      </p:cBhvr>
+                                      <p:to>
+                                        <p:strVal val="visible"/>
+                                      </p:to>
+                                    </p:set>
+                                    <p:animEffect transition="in" filter="fade">
+                                      <p:cBhvr>
+                                        <p:cTn id="16" dur="500"/>
+                                        <p:tgtEl>
+                                          <p:spTgt spid="20"/>
+                                        </p:tgtEl>
+                                      </p:cBhvr>
+                                    </p:animEffect>
+                                  </p:childTnLst>
+                                </p:cTn>
+                              </p:par>
+                              <p:par>
+                                <p:cTn id="17" presetID="10" presetClass="entr" presetSubtype="0" fill="hold" nodeType="withEffect">
+                                  <p:stCondLst>
+                                    <p:cond delay="1200"/>
+                                  </p:stCondLst>
+                                  <p:childTnLst>
+                                    <p:set>
+                                      <p:cBhvr>
+                                        <p:cTn id="18" dur="1" fill="hold">
+                                          <p:stCondLst>
+                                            <p:cond delay="0"/>
+                                          </p:stCondLst>
+                                        </p:cTn>
+                                        <p:tgtEl>
+                                          <p:spTgt spid="21"/>
+                                        </p:tgtEl>
+                                        <p:attrNameLst>
+                                          <p:attrName>style.visibility</p:attrName>
+                                        </p:attrNameLst>
+                                      </p:cBhvr>
+                                      <p:to>
+                                        <p:strVal val="visible"/>
+                                      </p:to>
+                                    </p:set>
+                                    <p:animEffect transition="in" filter="fade">
+                                      <p:cBhvr>
+                                        <p:cTn id="19" dur="500"/>
+                                        <p:tgtEl>
+                                          <p:spTgt spid="21"/>
+                                        </p:tgtEl>
+                                      </p:cBhvr>
+                                    </p:animEffect>
+                                  </p:childTnLst>
+                                </p:cTn>
+                              </p:par>
+                            </p:childTnLst>
+                          </p:cTn>
+                        </p:par>
+                      </p:childTnLst>
+                    </p:cTn>
+                  </p:par>
+                </p:childTnLst>
+              </p:cTn>
+              <p:prevCondLst>
+                <p:cond evt="onPrev" delay="0">
+                  <p:tgtEl>
+                    <p:sldTgt/>
+                  </p:tgtEl>
+                </p:cond>
+              </p:prevCondLst>
+              <p:nextCondLst>
+                <p:cond evt="onNext" delay="0">
+                  <p:tgtEl>
+                    <p:sldTgt/>
+                  </p:tgtEl>
+                </p:cond>
+              </p:nextCondLst>
+            </p:seq>
+          </p:childTnLst>
+        </p:cTn>
+      </p:par>
+    </p:tnLst>
+  </p:timing>
 </p:sld>
 </file>
 
@@ -28278,6 +31533,209 @@
   <p:clrMapOvr>
     <a:masterClrMapping/>
   </p:clrMapOvr>
+  <mc:AlternateContent xmlns:mc="http://schemas.openxmlformats.org/markup-compatibility/2006">
+    <mc:Choice xmlns:p14="http://schemas.microsoft.com/office/powerpoint/2010/main" Requires="p14">
+      <p:transition spd="med" p14:dur="700">
+        <p:fade/>
+      </p:transition>
+    </mc:Choice>
+    <mc:Fallback>
+      <p:transition spd="med">
+        <p:fade/>
+      </p:transition>
+    </mc:Fallback>
+  </mc:AlternateContent>
+  <p:timing>
+    <p:tnLst>
+      <p:par>
+        <p:cTn id="1" dur="indefinite" restart="never" nodeType="tmRoot">
+          <p:childTnLst>
+            <p:seq concurrent="1" nextAc="seek">
+              <p:cTn id="2" dur="indefinite" nodeType="mainSeq">
+                <p:childTnLst>
+                  <p:par>
+                    <p:cTn id="3" fill="hold">
+                      <p:stCondLst>
+                        <p:cond delay="indefinite"/>
+                        <p:cond evt="onBegin" delay="0">
+                          <p:tn val="2"/>
+                        </p:cond>
+                      </p:stCondLst>
+                      <p:childTnLst>
+                        <p:par>
+                          <p:cTn id="4" fill="hold">
+                            <p:stCondLst>
+                              <p:cond delay="0"/>
+                            </p:stCondLst>
+                            <p:childTnLst>
+                              <p:par>
+                                <p:cTn id="5" presetID="10" presetClass="entr" presetSubtype="0" fill="hold" nodeType="afterEffect">
+                                  <p:stCondLst>
+                                    <p:cond delay="0"/>
+                                  </p:stCondLst>
+                                  <p:childTnLst>
+                                    <p:set>
+                                      <p:cBhvr>
+                                        <p:cTn id="6" dur="1" fill="hold">
+                                          <p:stCondLst>
+                                            <p:cond delay="0"/>
+                                          </p:stCondLst>
+                                        </p:cTn>
+                                        <p:tgtEl>
+                                          <p:spTgt spid="4"/>
+                                        </p:tgtEl>
+                                        <p:attrNameLst>
+                                          <p:attrName>style.visibility</p:attrName>
+                                        </p:attrNameLst>
+                                      </p:cBhvr>
+                                      <p:to>
+                                        <p:strVal val="visible"/>
+                                      </p:to>
+                                    </p:set>
+                                    <p:animEffect transition="in" filter="fade">
+                                      <p:cBhvr>
+                                        <p:cTn id="7" dur="500"/>
+                                        <p:tgtEl>
+                                          <p:spTgt spid="4"/>
+                                        </p:tgtEl>
+                                      </p:cBhvr>
+                                    </p:animEffect>
+                                  </p:childTnLst>
+                                </p:cTn>
+                              </p:par>
+                              <p:par>
+                                <p:cTn id="8" presetID="10" presetClass="entr" presetSubtype="0" fill="hold" nodeType="withEffect">
+                                  <p:stCondLst>
+                                    <p:cond delay="300"/>
+                                  </p:stCondLst>
+                                  <p:childTnLst>
+                                    <p:set>
+                                      <p:cBhvr>
+                                        <p:cTn id="9" dur="1" fill="hold">
+                                          <p:stCondLst>
+                                            <p:cond delay="0"/>
+                                          </p:stCondLst>
+                                        </p:cTn>
+                                        <p:tgtEl>
+                                          <p:spTgt spid="29"/>
+                                        </p:tgtEl>
+                                        <p:attrNameLst>
+                                          <p:attrName>style.visibility</p:attrName>
+                                        </p:attrNameLst>
+                                      </p:cBhvr>
+                                      <p:to>
+                                        <p:strVal val="visible"/>
+                                      </p:to>
+                                    </p:set>
+                                    <p:animEffect transition="in" filter="fade">
+                                      <p:cBhvr>
+                                        <p:cTn id="10" dur="500"/>
+                                        <p:tgtEl>
+                                          <p:spTgt spid="29"/>
+                                        </p:tgtEl>
+                                      </p:cBhvr>
+                                    </p:animEffect>
+                                  </p:childTnLst>
+                                </p:cTn>
+                              </p:par>
+                              <p:par>
+                                <p:cTn id="11" presetID="10" presetClass="entr" presetSubtype="0" fill="hold" nodeType="withEffect">
+                                  <p:stCondLst>
+                                    <p:cond delay="600"/>
+                                  </p:stCondLst>
+                                  <p:childTnLst>
+                                    <p:set>
+                                      <p:cBhvr>
+                                        <p:cTn id="12" dur="1" fill="hold">
+                                          <p:stCondLst>
+                                            <p:cond delay="0"/>
+                                          </p:stCondLst>
+                                        </p:cTn>
+                                        <p:tgtEl>
+                                          <p:spTgt spid="30"/>
+                                        </p:tgtEl>
+                                        <p:attrNameLst>
+                                          <p:attrName>style.visibility</p:attrName>
+                                        </p:attrNameLst>
+                                      </p:cBhvr>
+                                      <p:to>
+                                        <p:strVal val="visible"/>
+                                      </p:to>
+                                    </p:set>
+                                    <p:animEffect transition="in" filter="fade">
+                                      <p:cBhvr>
+                                        <p:cTn id="13" dur="500"/>
+                                        <p:tgtEl>
+                                          <p:spTgt spid="30"/>
+                                        </p:tgtEl>
+                                      </p:cBhvr>
+                                    </p:animEffect>
+                                  </p:childTnLst>
+                                </p:cTn>
+                              </p:par>
+                              <p:par>
+                                <p:cTn id="14" presetID="10" presetClass="entr" presetSubtype="0" fill="hold" nodeType="withEffect">
+                                  <p:stCondLst>
+                                    <p:cond delay="900"/>
+                                  </p:stCondLst>
+                                  <p:childTnLst>
+                                    <p:set>
+                                      <p:cBhvr>
+                                        <p:cTn id="15" dur="1" fill="hold">
+                                          <p:stCondLst>
+                                            <p:cond delay="0"/>
+                                          </p:stCondLst>
+                                        </p:cTn>
+                                        <p:tgtEl>
+                                          <p:spTgt spid="31"/>
+                                        </p:tgtEl>
+                                        <p:attrNameLst>
+                                          <p:attrName>style.visibility</p:attrName>
+                                        </p:attrNameLst>
+                                      </p:cBhvr>
+                                      <p:to>
+                                        <p:strVal val="visible"/>
+                                      </p:to>
+                                    </p:set>
+                                    <p:animEffect transition="in" filter="fade">
+                                      <p:cBhvr>
+                                        <p:cTn id="16" dur="500"/>
+                                        <p:tgtEl>
+                                          <p:spTgt spid="31"/>
+                                        </p:tgtEl>
+                                      </p:cBhvr>
+                                    </p:animEffect>
+                                  </p:childTnLst>
+                                </p:cTn>
+                              </p:par>
+                            </p:childTnLst>
+                          </p:cTn>
+                        </p:par>
+                      </p:childTnLst>
+                    </p:cTn>
+                  </p:par>
+                </p:childTnLst>
+              </p:cTn>
+              <p:prevCondLst>
+                <p:cond evt="onPrev" delay="0">
+                  <p:tgtEl>
+                    <p:sldTgt/>
+                  </p:tgtEl>
+                </p:cond>
+              </p:prevCondLst>
+              <p:nextCondLst>
+                <p:cond evt="onNext" delay="0">
+                  <p:tgtEl>
+                    <p:sldTgt/>
+                  </p:tgtEl>
+                </p:cond>
+              </p:nextCondLst>
+            </p:seq>
+          </p:childTnLst>
+        </p:cTn>
+      </p:par>
+    </p:tnLst>
+  </p:timing>
 </p:sld>
 </file>
 
@@ -30440,6 +33898,209 @@
   <p:clrMapOvr>
     <a:masterClrMapping/>
   </p:clrMapOvr>
+  <mc:AlternateContent xmlns:mc="http://schemas.openxmlformats.org/markup-compatibility/2006">
+    <mc:Choice xmlns:p14="http://schemas.microsoft.com/office/powerpoint/2010/main" Requires="p14">
+      <p:transition spd="med" p14:dur="700">
+        <p:fade/>
+      </p:transition>
+    </mc:Choice>
+    <mc:Fallback>
+      <p:transition spd="med">
+        <p:fade/>
+      </p:transition>
+    </mc:Fallback>
+  </mc:AlternateContent>
+  <p:timing>
+    <p:tnLst>
+      <p:par>
+        <p:cTn id="1" dur="indefinite" restart="never" nodeType="tmRoot">
+          <p:childTnLst>
+            <p:seq concurrent="1" nextAc="seek">
+              <p:cTn id="2" dur="indefinite" nodeType="mainSeq">
+                <p:childTnLst>
+                  <p:par>
+                    <p:cTn id="3" fill="hold">
+                      <p:stCondLst>
+                        <p:cond delay="indefinite"/>
+                        <p:cond evt="onBegin" delay="0">
+                          <p:tn val="2"/>
+                        </p:cond>
+                      </p:stCondLst>
+                      <p:childTnLst>
+                        <p:par>
+                          <p:cTn id="4" fill="hold">
+                            <p:stCondLst>
+                              <p:cond delay="0"/>
+                            </p:stCondLst>
+                            <p:childTnLst>
+                              <p:par>
+                                <p:cTn id="5" presetID="10" presetClass="entr" presetSubtype="0" fill="hold" nodeType="afterEffect">
+                                  <p:stCondLst>
+                                    <p:cond delay="0"/>
+                                  </p:stCondLst>
+                                  <p:childTnLst>
+                                    <p:set>
+                                      <p:cBhvr>
+                                        <p:cTn id="6" dur="1" fill="hold">
+                                          <p:stCondLst>
+                                            <p:cond delay="0"/>
+                                          </p:stCondLst>
+                                        </p:cTn>
+                                        <p:tgtEl>
+                                          <p:spTgt spid="3"/>
+                                        </p:tgtEl>
+                                        <p:attrNameLst>
+                                          <p:attrName>style.visibility</p:attrName>
+                                        </p:attrNameLst>
+                                      </p:cBhvr>
+                                      <p:to>
+                                        <p:strVal val="visible"/>
+                                      </p:to>
+                                    </p:set>
+                                    <p:animEffect transition="in" filter="fade">
+                                      <p:cBhvr>
+                                        <p:cTn id="7" dur="500"/>
+                                        <p:tgtEl>
+                                          <p:spTgt spid="3"/>
+                                        </p:tgtEl>
+                                      </p:cBhvr>
+                                    </p:animEffect>
+                                  </p:childTnLst>
+                                </p:cTn>
+                              </p:par>
+                              <p:par>
+                                <p:cTn id="8" presetID="10" presetClass="entr" presetSubtype="0" fill="hold" nodeType="withEffect">
+                                  <p:stCondLst>
+                                    <p:cond delay="300"/>
+                                  </p:stCondLst>
+                                  <p:childTnLst>
+                                    <p:set>
+                                      <p:cBhvr>
+                                        <p:cTn id="9" dur="1" fill="hold">
+                                          <p:stCondLst>
+                                            <p:cond delay="0"/>
+                                          </p:stCondLst>
+                                        </p:cTn>
+                                        <p:tgtEl>
+                                          <p:spTgt spid="5"/>
+                                        </p:tgtEl>
+                                        <p:attrNameLst>
+                                          <p:attrName>style.visibility</p:attrName>
+                                        </p:attrNameLst>
+                                      </p:cBhvr>
+                                      <p:to>
+                                        <p:strVal val="visible"/>
+                                      </p:to>
+                                    </p:set>
+                                    <p:animEffect transition="in" filter="fade">
+                                      <p:cBhvr>
+                                        <p:cTn id="10" dur="500"/>
+                                        <p:tgtEl>
+                                          <p:spTgt spid="5"/>
+                                        </p:tgtEl>
+                                      </p:cBhvr>
+                                    </p:animEffect>
+                                  </p:childTnLst>
+                                </p:cTn>
+                              </p:par>
+                              <p:par>
+                                <p:cTn id="11" presetID="10" presetClass="entr" presetSubtype="0" fill="hold" nodeType="withEffect">
+                                  <p:stCondLst>
+                                    <p:cond delay="600"/>
+                                  </p:stCondLst>
+                                  <p:childTnLst>
+                                    <p:set>
+                                      <p:cBhvr>
+                                        <p:cTn id="12" dur="1" fill="hold">
+                                          <p:stCondLst>
+                                            <p:cond delay="0"/>
+                                          </p:stCondLst>
+                                        </p:cTn>
+                                        <p:tgtEl>
+                                          <p:spTgt spid="6"/>
+                                        </p:tgtEl>
+                                        <p:attrNameLst>
+                                          <p:attrName>style.visibility</p:attrName>
+                                        </p:attrNameLst>
+                                      </p:cBhvr>
+                                      <p:to>
+                                        <p:strVal val="visible"/>
+                                      </p:to>
+                                    </p:set>
+                                    <p:animEffect transition="in" filter="fade">
+                                      <p:cBhvr>
+                                        <p:cTn id="13" dur="500"/>
+                                        <p:tgtEl>
+                                          <p:spTgt spid="6"/>
+                                        </p:tgtEl>
+                                      </p:cBhvr>
+                                    </p:animEffect>
+                                  </p:childTnLst>
+                                </p:cTn>
+                              </p:par>
+                              <p:par>
+                                <p:cTn id="14" presetID="10" presetClass="entr" presetSubtype="0" fill="hold" nodeType="withEffect">
+                                  <p:stCondLst>
+                                    <p:cond delay="900"/>
+                                  </p:stCondLst>
+                                  <p:childTnLst>
+                                    <p:set>
+                                      <p:cBhvr>
+                                        <p:cTn id="15" dur="1" fill="hold">
+                                          <p:stCondLst>
+                                            <p:cond delay="0"/>
+                                          </p:stCondLst>
+                                        </p:cTn>
+                                        <p:tgtEl>
+                                          <p:spTgt spid="7"/>
+                                        </p:tgtEl>
+                                        <p:attrNameLst>
+                                          <p:attrName>style.visibility</p:attrName>
+                                        </p:attrNameLst>
+                                      </p:cBhvr>
+                                      <p:to>
+                                        <p:strVal val="visible"/>
+                                      </p:to>
+                                    </p:set>
+                                    <p:animEffect transition="in" filter="fade">
+                                      <p:cBhvr>
+                                        <p:cTn id="16" dur="500"/>
+                                        <p:tgtEl>
+                                          <p:spTgt spid="7"/>
+                                        </p:tgtEl>
+                                      </p:cBhvr>
+                                    </p:animEffect>
+                                  </p:childTnLst>
+                                </p:cTn>
+                              </p:par>
+                            </p:childTnLst>
+                          </p:cTn>
+                        </p:par>
+                      </p:childTnLst>
+                    </p:cTn>
+                  </p:par>
+                </p:childTnLst>
+              </p:cTn>
+              <p:prevCondLst>
+                <p:cond evt="onPrev" delay="0">
+                  <p:tgtEl>
+                    <p:sldTgt/>
+                  </p:tgtEl>
+                </p:cond>
+              </p:prevCondLst>
+              <p:nextCondLst>
+                <p:cond evt="onNext" delay="0">
+                  <p:tgtEl>
+                    <p:sldTgt/>
+                  </p:tgtEl>
+                </p:cond>
+              </p:nextCondLst>
+            </p:seq>
+          </p:childTnLst>
+        </p:cTn>
+      </p:par>
+    </p:tnLst>
+  </p:timing>
 </p:sld>
 </file>
 
@@ -32793,6 +36454,209 @@
   <p:clrMapOvr>
     <a:masterClrMapping/>
   </p:clrMapOvr>
+  <mc:AlternateContent xmlns:mc="http://schemas.openxmlformats.org/markup-compatibility/2006">
+    <mc:Choice xmlns:p14="http://schemas.microsoft.com/office/powerpoint/2010/main" Requires="p14">
+      <p:transition spd="med" p14:dur="700">
+        <p:fade/>
+      </p:transition>
+    </mc:Choice>
+    <mc:Fallback>
+      <p:transition spd="med">
+        <p:fade/>
+      </p:transition>
+    </mc:Fallback>
+  </mc:AlternateContent>
+  <p:timing>
+    <p:tnLst>
+      <p:par>
+        <p:cTn id="1" dur="indefinite" restart="never" nodeType="tmRoot">
+          <p:childTnLst>
+            <p:seq concurrent="1" nextAc="seek">
+              <p:cTn id="2" dur="indefinite" nodeType="mainSeq">
+                <p:childTnLst>
+                  <p:par>
+                    <p:cTn id="3" fill="hold">
+                      <p:stCondLst>
+                        <p:cond delay="indefinite"/>
+                        <p:cond evt="onBegin" delay="0">
+                          <p:tn val="2"/>
+                        </p:cond>
+                      </p:stCondLst>
+                      <p:childTnLst>
+                        <p:par>
+                          <p:cTn id="4" fill="hold">
+                            <p:stCondLst>
+                              <p:cond delay="0"/>
+                            </p:stCondLst>
+                            <p:childTnLst>
+                              <p:par>
+                                <p:cTn id="5" presetID="10" presetClass="entr" presetSubtype="0" fill="hold" nodeType="afterEffect">
+                                  <p:stCondLst>
+                                    <p:cond delay="0"/>
+                                  </p:stCondLst>
+                                  <p:childTnLst>
+                                    <p:set>
+                                      <p:cBhvr>
+                                        <p:cTn id="6" dur="1" fill="hold">
+                                          <p:stCondLst>
+                                            <p:cond delay="0"/>
+                                          </p:stCondLst>
+                                        </p:cTn>
+                                        <p:tgtEl>
+                                          <p:spTgt spid="4"/>
+                                        </p:tgtEl>
+                                        <p:attrNameLst>
+                                          <p:attrName>style.visibility</p:attrName>
+                                        </p:attrNameLst>
+                                      </p:cBhvr>
+                                      <p:to>
+                                        <p:strVal val="visible"/>
+                                      </p:to>
+                                    </p:set>
+                                    <p:animEffect transition="in" filter="fade">
+                                      <p:cBhvr>
+                                        <p:cTn id="7" dur="500"/>
+                                        <p:tgtEl>
+                                          <p:spTgt spid="4"/>
+                                        </p:tgtEl>
+                                      </p:cBhvr>
+                                    </p:animEffect>
+                                  </p:childTnLst>
+                                </p:cTn>
+                              </p:par>
+                              <p:par>
+                                <p:cTn id="8" presetID="10" presetClass="entr" presetSubtype="0" fill="hold" nodeType="withEffect">
+                                  <p:stCondLst>
+                                    <p:cond delay="300"/>
+                                  </p:stCondLst>
+                                  <p:childTnLst>
+                                    <p:set>
+                                      <p:cBhvr>
+                                        <p:cTn id="9" dur="1" fill="hold">
+                                          <p:stCondLst>
+                                            <p:cond delay="0"/>
+                                          </p:stCondLst>
+                                        </p:cTn>
+                                        <p:tgtEl>
+                                          <p:spTgt spid="73"/>
+                                        </p:tgtEl>
+                                        <p:attrNameLst>
+                                          <p:attrName>style.visibility</p:attrName>
+                                        </p:attrNameLst>
+                                      </p:cBhvr>
+                                      <p:to>
+                                        <p:strVal val="visible"/>
+                                      </p:to>
+                                    </p:set>
+                                    <p:animEffect transition="in" filter="fade">
+                                      <p:cBhvr>
+                                        <p:cTn id="10" dur="500"/>
+                                        <p:tgtEl>
+                                          <p:spTgt spid="73"/>
+                                        </p:tgtEl>
+                                      </p:cBhvr>
+                                    </p:animEffect>
+                                  </p:childTnLst>
+                                </p:cTn>
+                              </p:par>
+                              <p:par>
+                                <p:cTn id="11" presetID="10" presetClass="entr" presetSubtype="0" fill="hold" nodeType="withEffect">
+                                  <p:stCondLst>
+                                    <p:cond delay="600"/>
+                                  </p:stCondLst>
+                                  <p:childTnLst>
+                                    <p:set>
+                                      <p:cBhvr>
+                                        <p:cTn id="12" dur="1" fill="hold">
+                                          <p:stCondLst>
+                                            <p:cond delay="0"/>
+                                          </p:stCondLst>
+                                        </p:cTn>
+                                        <p:tgtEl>
+                                          <p:spTgt spid="74"/>
+                                        </p:tgtEl>
+                                        <p:attrNameLst>
+                                          <p:attrName>style.visibility</p:attrName>
+                                        </p:attrNameLst>
+                                      </p:cBhvr>
+                                      <p:to>
+                                        <p:strVal val="visible"/>
+                                      </p:to>
+                                    </p:set>
+                                    <p:animEffect transition="in" filter="fade">
+                                      <p:cBhvr>
+                                        <p:cTn id="13" dur="500"/>
+                                        <p:tgtEl>
+                                          <p:spTgt spid="74"/>
+                                        </p:tgtEl>
+                                      </p:cBhvr>
+                                    </p:animEffect>
+                                  </p:childTnLst>
+                                </p:cTn>
+                              </p:par>
+                              <p:par>
+                                <p:cTn id="14" presetID="10" presetClass="entr" presetSubtype="0" fill="hold" nodeType="withEffect">
+                                  <p:stCondLst>
+                                    <p:cond delay="900"/>
+                                  </p:stCondLst>
+                                  <p:childTnLst>
+                                    <p:set>
+                                      <p:cBhvr>
+                                        <p:cTn id="15" dur="1" fill="hold">
+                                          <p:stCondLst>
+                                            <p:cond delay="0"/>
+                                          </p:stCondLst>
+                                        </p:cTn>
+                                        <p:tgtEl>
+                                          <p:spTgt spid="75"/>
+                                        </p:tgtEl>
+                                        <p:attrNameLst>
+                                          <p:attrName>style.visibility</p:attrName>
+                                        </p:attrNameLst>
+                                      </p:cBhvr>
+                                      <p:to>
+                                        <p:strVal val="visible"/>
+                                      </p:to>
+                                    </p:set>
+                                    <p:animEffect transition="in" filter="fade">
+                                      <p:cBhvr>
+                                        <p:cTn id="16" dur="500"/>
+                                        <p:tgtEl>
+                                          <p:spTgt spid="75"/>
+                                        </p:tgtEl>
+                                      </p:cBhvr>
+                                    </p:animEffect>
+                                  </p:childTnLst>
+                                </p:cTn>
+                              </p:par>
+                            </p:childTnLst>
+                          </p:cTn>
+                        </p:par>
+                      </p:childTnLst>
+                    </p:cTn>
+                  </p:par>
+                </p:childTnLst>
+              </p:cTn>
+              <p:prevCondLst>
+                <p:cond evt="onPrev" delay="0">
+                  <p:tgtEl>
+                    <p:sldTgt/>
+                  </p:tgtEl>
+                </p:cond>
+              </p:prevCondLst>
+              <p:nextCondLst>
+                <p:cond evt="onNext" delay="0">
+                  <p:tgtEl>
+                    <p:sldTgt/>
+                  </p:tgtEl>
+                </p:cond>
+              </p:nextCondLst>
+            </p:seq>
+          </p:childTnLst>
+        </p:cTn>
+      </p:par>
+    </p:tnLst>
+  </p:timing>
 </p:sld>
 </file>
 
@@ -33854,6 +37718,209 @@
   <p:clrMapOvr>
     <a:masterClrMapping/>
   </p:clrMapOvr>
+  <mc:AlternateContent xmlns:mc="http://schemas.openxmlformats.org/markup-compatibility/2006">
+    <mc:Choice xmlns:p14="http://schemas.microsoft.com/office/powerpoint/2010/main" Requires="p14">
+      <p:transition spd="med" p14:dur="700">
+        <p:fade/>
+      </p:transition>
+    </mc:Choice>
+    <mc:Fallback>
+      <p:transition spd="med">
+        <p:fade/>
+      </p:transition>
+    </mc:Fallback>
+  </mc:AlternateContent>
+  <p:timing>
+    <p:tnLst>
+      <p:par>
+        <p:cTn id="1" dur="indefinite" restart="never" nodeType="tmRoot">
+          <p:childTnLst>
+            <p:seq concurrent="1" nextAc="seek">
+              <p:cTn id="2" dur="indefinite" nodeType="mainSeq">
+                <p:childTnLst>
+                  <p:par>
+                    <p:cTn id="3" fill="hold">
+                      <p:stCondLst>
+                        <p:cond delay="indefinite"/>
+                        <p:cond evt="onBegin" delay="0">
+                          <p:tn val="2"/>
+                        </p:cond>
+                      </p:stCondLst>
+                      <p:childTnLst>
+                        <p:par>
+                          <p:cTn id="4" fill="hold">
+                            <p:stCondLst>
+                              <p:cond delay="0"/>
+                            </p:stCondLst>
+                            <p:childTnLst>
+                              <p:par>
+                                <p:cTn id="5" presetID="10" presetClass="entr" presetSubtype="0" fill="hold" nodeType="afterEffect">
+                                  <p:stCondLst>
+                                    <p:cond delay="0"/>
+                                  </p:stCondLst>
+                                  <p:childTnLst>
+                                    <p:set>
+                                      <p:cBhvr>
+                                        <p:cTn id="6" dur="1" fill="hold">
+                                          <p:stCondLst>
+                                            <p:cond delay="0"/>
+                                          </p:stCondLst>
+                                        </p:cTn>
+                                        <p:tgtEl>
+                                          <p:spTgt spid="4"/>
+                                        </p:tgtEl>
+                                        <p:attrNameLst>
+                                          <p:attrName>style.visibility</p:attrName>
+                                        </p:attrNameLst>
+                                      </p:cBhvr>
+                                      <p:to>
+                                        <p:strVal val="visible"/>
+                                      </p:to>
+                                    </p:set>
+                                    <p:animEffect transition="in" filter="fade">
+                                      <p:cBhvr>
+                                        <p:cTn id="7" dur="500"/>
+                                        <p:tgtEl>
+                                          <p:spTgt spid="4"/>
+                                        </p:tgtEl>
+                                      </p:cBhvr>
+                                    </p:animEffect>
+                                  </p:childTnLst>
+                                </p:cTn>
+                              </p:par>
+                              <p:par>
+                                <p:cTn id="8" presetID="10" presetClass="entr" presetSubtype="0" fill="hold" nodeType="withEffect">
+                                  <p:stCondLst>
+                                    <p:cond delay="300"/>
+                                  </p:stCondLst>
+                                  <p:childTnLst>
+                                    <p:set>
+                                      <p:cBhvr>
+                                        <p:cTn id="9" dur="1" fill="hold">
+                                          <p:stCondLst>
+                                            <p:cond delay="0"/>
+                                          </p:stCondLst>
+                                        </p:cTn>
+                                        <p:tgtEl>
+                                          <p:spTgt spid="30"/>
+                                        </p:tgtEl>
+                                        <p:attrNameLst>
+                                          <p:attrName>style.visibility</p:attrName>
+                                        </p:attrNameLst>
+                                      </p:cBhvr>
+                                      <p:to>
+                                        <p:strVal val="visible"/>
+                                      </p:to>
+                                    </p:set>
+                                    <p:animEffect transition="in" filter="fade">
+                                      <p:cBhvr>
+                                        <p:cTn id="10" dur="500"/>
+                                        <p:tgtEl>
+                                          <p:spTgt spid="30"/>
+                                        </p:tgtEl>
+                                      </p:cBhvr>
+                                    </p:animEffect>
+                                  </p:childTnLst>
+                                </p:cTn>
+                              </p:par>
+                              <p:par>
+                                <p:cTn id="11" presetID="10" presetClass="entr" presetSubtype="0" fill="hold" nodeType="withEffect">
+                                  <p:stCondLst>
+                                    <p:cond delay="600"/>
+                                  </p:stCondLst>
+                                  <p:childTnLst>
+                                    <p:set>
+                                      <p:cBhvr>
+                                        <p:cTn id="12" dur="1" fill="hold">
+                                          <p:stCondLst>
+                                            <p:cond delay="0"/>
+                                          </p:stCondLst>
+                                        </p:cTn>
+                                        <p:tgtEl>
+                                          <p:spTgt spid="31"/>
+                                        </p:tgtEl>
+                                        <p:attrNameLst>
+                                          <p:attrName>style.visibility</p:attrName>
+                                        </p:attrNameLst>
+                                      </p:cBhvr>
+                                      <p:to>
+                                        <p:strVal val="visible"/>
+                                      </p:to>
+                                    </p:set>
+                                    <p:animEffect transition="in" filter="fade">
+                                      <p:cBhvr>
+                                        <p:cTn id="13" dur="500"/>
+                                        <p:tgtEl>
+                                          <p:spTgt spid="31"/>
+                                        </p:tgtEl>
+                                      </p:cBhvr>
+                                    </p:animEffect>
+                                  </p:childTnLst>
+                                </p:cTn>
+                              </p:par>
+                              <p:par>
+                                <p:cTn id="14" presetID="10" presetClass="entr" presetSubtype="0" fill="hold" nodeType="withEffect">
+                                  <p:stCondLst>
+                                    <p:cond delay="900"/>
+                                  </p:stCondLst>
+                                  <p:childTnLst>
+                                    <p:set>
+                                      <p:cBhvr>
+                                        <p:cTn id="15" dur="1" fill="hold">
+                                          <p:stCondLst>
+                                            <p:cond delay="0"/>
+                                          </p:stCondLst>
+                                        </p:cTn>
+                                        <p:tgtEl>
+                                          <p:spTgt spid="32"/>
+                                        </p:tgtEl>
+                                        <p:attrNameLst>
+                                          <p:attrName>style.visibility</p:attrName>
+                                        </p:attrNameLst>
+                                      </p:cBhvr>
+                                      <p:to>
+                                        <p:strVal val="visible"/>
+                                      </p:to>
+                                    </p:set>
+                                    <p:animEffect transition="in" filter="fade">
+                                      <p:cBhvr>
+                                        <p:cTn id="16" dur="500"/>
+                                        <p:tgtEl>
+                                          <p:spTgt spid="32"/>
+                                        </p:tgtEl>
+                                      </p:cBhvr>
+                                    </p:animEffect>
+                                  </p:childTnLst>
+                                </p:cTn>
+                              </p:par>
+                            </p:childTnLst>
+                          </p:cTn>
+                        </p:par>
+                      </p:childTnLst>
+                    </p:cTn>
+                  </p:par>
+                </p:childTnLst>
+              </p:cTn>
+              <p:prevCondLst>
+                <p:cond evt="onPrev" delay="0">
+                  <p:tgtEl>
+                    <p:sldTgt/>
+                  </p:tgtEl>
+                </p:cond>
+              </p:prevCondLst>
+              <p:nextCondLst>
+                <p:cond evt="onNext" delay="0">
+                  <p:tgtEl>
+                    <p:sldTgt/>
+                  </p:tgtEl>
+                </p:cond>
+              </p:nextCondLst>
+            </p:seq>
+          </p:childTnLst>
+        </p:cTn>
+      </p:par>
+    </p:tnLst>
+  </p:timing>
 </p:sld>
 </file>
 
@@ -34552,6 +38619,279 @@
   <p:clrMapOvr>
     <a:masterClrMapping/>
   </p:clrMapOvr>
+  <mc:AlternateContent xmlns:mc="http://schemas.openxmlformats.org/markup-compatibility/2006">
+    <mc:Choice xmlns:p14="http://schemas.microsoft.com/office/powerpoint/2010/main" Requires="p14">
+      <p:transition spd="med" p14:dur="700">
+        <p:fade/>
+      </p:transition>
+    </mc:Choice>
+    <mc:Fallback>
+      <p:transition spd="med">
+        <p:fade/>
+      </p:transition>
+    </mc:Fallback>
+  </mc:AlternateContent>
+  <p:timing>
+    <p:tnLst>
+      <p:par>
+        <p:cTn id="1" dur="indefinite" restart="never" nodeType="tmRoot">
+          <p:childTnLst>
+            <p:seq concurrent="1" nextAc="seek">
+              <p:cTn id="2" dur="indefinite" nodeType="mainSeq">
+                <p:childTnLst>
+                  <p:par>
+                    <p:cTn id="3" fill="hold">
+                      <p:stCondLst>
+                        <p:cond delay="indefinite"/>
+                        <p:cond evt="onBegin" delay="0">
+                          <p:tn val="2"/>
+                        </p:cond>
+                      </p:stCondLst>
+                      <p:childTnLst>
+                        <p:par>
+                          <p:cTn id="4" fill="hold">
+                            <p:stCondLst>
+                              <p:cond delay="0"/>
+                            </p:stCondLst>
+                            <p:childTnLst>
+                              <p:par>
+                                <p:cTn id="5" presetID="10" presetClass="entr" presetSubtype="0" fill="hold" nodeType="afterEffect">
+                                  <p:stCondLst>
+                                    <p:cond delay="0"/>
+                                  </p:stCondLst>
+                                  <p:childTnLst>
+                                    <p:set>
+                                      <p:cBhvr>
+                                        <p:cTn id="6" dur="1" fill="hold">
+                                          <p:stCondLst>
+                                            <p:cond delay="0"/>
+                                          </p:stCondLst>
+                                        </p:cTn>
+                                        <p:tgtEl>
+                                          <p:spTgt spid="4"/>
+                                        </p:tgtEl>
+                                        <p:attrNameLst>
+                                          <p:attrName>style.visibility</p:attrName>
+                                        </p:attrNameLst>
+                                      </p:cBhvr>
+                                      <p:to>
+                                        <p:strVal val="visible"/>
+                                      </p:to>
+                                    </p:set>
+                                    <p:animEffect transition="in" filter="fade">
+                                      <p:cBhvr>
+                                        <p:cTn id="7" dur="500"/>
+                                        <p:tgtEl>
+                                          <p:spTgt spid="4"/>
+                                        </p:tgtEl>
+                                      </p:cBhvr>
+                                    </p:animEffect>
+                                  </p:childTnLst>
+                                </p:cTn>
+                              </p:par>
+                              <p:par>
+                                <p:cTn id="8" presetID="10" presetClass="entr" presetSubtype="0" fill="hold" nodeType="withEffect">
+                                  <p:stCondLst>
+                                    <p:cond delay="300"/>
+                                  </p:stCondLst>
+                                  <p:childTnLst>
+                                    <p:set>
+                                      <p:cBhvr>
+                                        <p:cTn id="9" dur="1" fill="hold">
+                                          <p:stCondLst>
+                                            <p:cond delay="0"/>
+                                          </p:stCondLst>
+                                        </p:cTn>
+                                        <p:tgtEl>
+                                          <p:spTgt spid="5"/>
+                                        </p:tgtEl>
+                                        <p:attrNameLst>
+                                          <p:attrName>style.visibility</p:attrName>
+                                        </p:attrNameLst>
+                                      </p:cBhvr>
+                                      <p:to>
+                                        <p:strVal val="visible"/>
+                                      </p:to>
+                                    </p:set>
+                                    <p:animEffect transition="in" filter="fade">
+                                      <p:cBhvr>
+                                        <p:cTn id="10" dur="500"/>
+                                        <p:tgtEl>
+                                          <p:spTgt spid="5"/>
+                                        </p:tgtEl>
+                                      </p:cBhvr>
+                                    </p:animEffect>
+                                  </p:childTnLst>
+                                </p:cTn>
+                              </p:par>
+                              <p:par>
+                                <p:cTn id="11" presetID="10" presetClass="entr" presetSubtype="0" fill="hold" nodeType="withEffect">
+                                  <p:stCondLst>
+                                    <p:cond delay="600"/>
+                                  </p:stCondLst>
+                                  <p:childTnLst>
+                                    <p:set>
+                                      <p:cBhvr>
+                                        <p:cTn id="12" dur="1" fill="hold">
+                                          <p:stCondLst>
+                                            <p:cond delay="0"/>
+                                          </p:stCondLst>
+                                        </p:cTn>
+                                        <p:tgtEl>
+                                          <p:spTgt spid="6"/>
+                                        </p:tgtEl>
+                                        <p:attrNameLst>
+                                          <p:attrName>style.visibility</p:attrName>
+                                        </p:attrNameLst>
+                                      </p:cBhvr>
+                                      <p:to>
+                                        <p:strVal val="visible"/>
+                                      </p:to>
+                                    </p:set>
+                                    <p:animEffect transition="in" filter="fade">
+                                      <p:cBhvr>
+                                        <p:cTn id="13" dur="500"/>
+                                        <p:tgtEl>
+                                          <p:spTgt spid="6"/>
+                                        </p:tgtEl>
+                                      </p:cBhvr>
+                                    </p:animEffect>
+                                  </p:childTnLst>
+                                </p:cTn>
+                              </p:par>
+                              <p:par>
+                                <p:cTn id="14" presetID="10" presetClass="entr" presetSubtype="0" fill="hold" nodeType="withEffect">
+                                  <p:stCondLst>
+                                    <p:cond delay="900"/>
+                                  </p:stCondLst>
+                                  <p:childTnLst>
+                                    <p:set>
+                                      <p:cBhvr>
+                                        <p:cTn id="15" dur="1" fill="hold">
+                                          <p:stCondLst>
+                                            <p:cond delay="0"/>
+                                          </p:stCondLst>
+                                        </p:cTn>
+                                        <p:tgtEl>
+                                          <p:spTgt spid="19"/>
+                                        </p:tgtEl>
+                                        <p:attrNameLst>
+                                          <p:attrName>style.visibility</p:attrName>
+                                        </p:attrNameLst>
+                                      </p:cBhvr>
+                                      <p:to>
+                                        <p:strVal val="visible"/>
+                                      </p:to>
+                                    </p:set>
+                                    <p:animEffect transition="in" filter="fade">
+                                      <p:cBhvr>
+                                        <p:cTn id="16" dur="500"/>
+                                        <p:tgtEl>
+                                          <p:spTgt spid="19"/>
+                                        </p:tgtEl>
+                                      </p:cBhvr>
+                                    </p:animEffect>
+                                  </p:childTnLst>
+                                </p:cTn>
+                              </p:par>
+                              <p:par>
+                                <p:cTn id="17" presetID="10" presetClass="entr" presetSubtype="0" fill="hold" nodeType="withEffect">
+                                  <p:stCondLst>
+                                    <p:cond delay="1200"/>
+                                  </p:stCondLst>
+                                  <p:childTnLst>
+                                    <p:set>
+                                      <p:cBhvr>
+                                        <p:cTn id="18" dur="1" fill="hold">
+                                          <p:stCondLst>
+                                            <p:cond delay="0"/>
+                                          </p:stCondLst>
+                                        </p:cTn>
+                                        <p:tgtEl>
+                                          <p:spTgt spid="20"/>
+                                        </p:tgtEl>
+                                        <p:attrNameLst>
+                                          <p:attrName>style.visibility</p:attrName>
+                                        </p:attrNameLst>
+                                      </p:cBhvr>
+                                      <p:to>
+                                        <p:strVal val="visible"/>
+                                      </p:to>
+                                    </p:set>
+                                    <p:animEffect transition="in" filter="fade">
+                                      <p:cBhvr>
+                                        <p:cTn id="19" dur="500"/>
+                                        <p:tgtEl>
+                                          <p:spTgt spid="20"/>
+                                        </p:tgtEl>
+                                      </p:cBhvr>
+                                    </p:animEffect>
+                                  </p:childTnLst>
+                                </p:cTn>
+                              </p:par>
+                              <p:par>
+                                <p:cTn id="20" presetID="10" presetClass="entr" presetSubtype="0" fill="hold" nodeType="withEffect">
+                                  <p:stCondLst>
+                                    <p:cond delay="1500"/>
+                                  </p:stCondLst>
+                                  <p:childTnLst>
+                                    <p:set>
+                                      <p:cBhvr>
+                                        <p:cTn id="21" dur="1" fill="hold">
+                                          <p:stCondLst>
+                                            <p:cond delay="0"/>
+                                          </p:stCondLst>
+                                        </p:cTn>
+                                        <p:tgtEl>
+                                          <p:spTgt spid="21"/>
+                                        </p:tgtEl>
+                                        <p:attrNameLst>
+                                          <p:attrName>style.visibility</p:attrName>
+                                        </p:attrNameLst>
+                                      </p:cBhvr>
+                                      <p:to>
+                                        <p:strVal val="visible"/>
+                                      </p:to>
+                                    </p:set>
+                                    <p:animEffect transition="in" filter="fade">
+                                      <p:cBhvr>
+                                        <p:cTn id="22" dur="500"/>
+                                        <p:tgtEl>
+                                          <p:spTgt spid="21"/>
+                                        </p:tgtEl>
+                                      </p:cBhvr>
+                                    </p:animEffect>
+                                  </p:childTnLst>
+                                </p:cTn>
+                              </p:par>
+                            </p:childTnLst>
+                          </p:cTn>
+                        </p:par>
+                      </p:childTnLst>
+                    </p:cTn>
+                  </p:par>
+                </p:childTnLst>
+              </p:cTn>
+              <p:prevCondLst>
+                <p:cond evt="onPrev" delay="0">
+                  <p:tgtEl>
+                    <p:sldTgt/>
+                  </p:tgtEl>
+                </p:cond>
+              </p:prevCondLst>
+              <p:nextCondLst>
+                <p:cond evt="onNext" delay="0">
+                  <p:tgtEl>
+                    <p:sldTgt/>
+                  </p:tgtEl>
+                </p:cond>
+              </p:nextCondLst>
+            </p:seq>
+          </p:childTnLst>
+        </p:cTn>
+      </p:par>
+    </p:tnLst>
+  </p:timing>
 </p:sld>
 </file>
 
@@ -35669,6 +40009,279 @@
   <p:clrMapOvr>
     <a:masterClrMapping/>
   </p:clrMapOvr>
+  <mc:AlternateContent xmlns:mc="http://schemas.openxmlformats.org/markup-compatibility/2006">
+    <mc:Choice xmlns:p14="http://schemas.microsoft.com/office/powerpoint/2010/main" Requires="p14">
+      <p:transition spd="med" p14:dur="700">
+        <p:fade/>
+      </p:transition>
+    </mc:Choice>
+    <mc:Fallback>
+      <p:transition spd="med">
+        <p:fade/>
+      </p:transition>
+    </mc:Fallback>
+  </mc:AlternateContent>
+  <p:timing>
+    <p:tnLst>
+      <p:par>
+        <p:cTn id="1" dur="indefinite" restart="never" nodeType="tmRoot">
+          <p:childTnLst>
+            <p:seq concurrent="1" nextAc="seek">
+              <p:cTn id="2" dur="indefinite" nodeType="mainSeq">
+                <p:childTnLst>
+                  <p:par>
+                    <p:cTn id="3" fill="hold">
+                      <p:stCondLst>
+                        <p:cond delay="indefinite"/>
+                        <p:cond evt="onBegin" delay="0">
+                          <p:tn val="2"/>
+                        </p:cond>
+                      </p:stCondLst>
+                      <p:childTnLst>
+                        <p:par>
+                          <p:cTn id="4" fill="hold">
+                            <p:stCondLst>
+                              <p:cond delay="0"/>
+                            </p:stCondLst>
+                            <p:childTnLst>
+                              <p:par>
+                                <p:cTn id="5" presetID="10" presetClass="entr" presetSubtype="0" fill="hold" nodeType="afterEffect">
+                                  <p:stCondLst>
+                                    <p:cond delay="0"/>
+                                  </p:stCondLst>
+                                  <p:childTnLst>
+                                    <p:set>
+                                      <p:cBhvr>
+                                        <p:cTn id="6" dur="1" fill="hold">
+                                          <p:stCondLst>
+                                            <p:cond delay="0"/>
+                                          </p:stCondLst>
+                                        </p:cTn>
+                                        <p:tgtEl>
+                                          <p:spTgt spid="4"/>
+                                        </p:tgtEl>
+                                        <p:attrNameLst>
+                                          <p:attrName>style.visibility</p:attrName>
+                                        </p:attrNameLst>
+                                      </p:cBhvr>
+                                      <p:to>
+                                        <p:strVal val="visible"/>
+                                      </p:to>
+                                    </p:set>
+                                    <p:animEffect transition="in" filter="fade">
+                                      <p:cBhvr>
+                                        <p:cTn id="7" dur="500"/>
+                                        <p:tgtEl>
+                                          <p:spTgt spid="4"/>
+                                        </p:tgtEl>
+                                      </p:cBhvr>
+                                    </p:animEffect>
+                                  </p:childTnLst>
+                                </p:cTn>
+                              </p:par>
+                              <p:par>
+                                <p:cTn id="8" presetID="10" presetClass="entr" presetSubtype="0" fill="hold" nodeType="withEffect">
+                                  <p:stCondLst>
+                                    <p:cond delay="300"/>
+                                  </p:stCondLst>
+                                  <p:childTnLst>
+                                    <p:set>
+                                      <p:cBhvr>
+                                        <p:cTn id="9" dur="1" fill="hold">
+                                          <p:stCondLst>
+                                            <p:cond delay="0"/>
+                                          </p:stCondLst>
+                                        </p:cTn>
+                                        <p:tgtEl>
+                                          <p:spTgt spid="6"/>
+                                        </p:tgtEl>
+                                        <p:attrNameLst>
+                                          <p:attrName>style.visibility</p:attrName>
+                                        </p:attrNameLst>
+                                      </p:cBhvr>
+                                      <p:to>
+                                        <p:strVal val="visible"/>
+                                      </p:to>
+                                    </p:set>
+                                    <p:animEffect transition="in" filter="fade">
+                                      <p:cBhvr>
+                                        <p:cTn id="10" dur="500"/>
+                                        <p:tgtEl>
+                                          <p:spTgt spid="6"/>
+                                        </p:tgtEl>
+                                      </p:cBhvr>
+                                    </p:animEffect>
+                                  </p:childTnLst>
+                                </p:cTn>
+                              </p:par>
+                              <p:par>
+                                <p:cTn id="11" presetID="10" presetClass="entr" presetSubtype="0" fill="hold" nodeType="withEffect">
+                                  <p:stCondLst>
+                                    <p:cond delay="600"/>
+                                  </p:stCondLst>
+                                  <p:childTnLst>
+                                    <p:set>
+                                      <p:cBhvr>
+                                        <p:cTn id="12" dur="1" fill="hold">
+                                          <p:stCondLst>
+                                            <p:cond delay="0"/>
+                                          </p:stCondLst>
+                                        </p:cTn>
+                                        <p:tgtEl>
+                                          <p:spTgt spid="29"/>
+                                        </p:tgtEl>
+                                        <p:attrNameLst>
+                                          <p:attrName>style.visibility</p:attrName>
+                                        </p:attrNameLst>
+                                      </p:cBhvr>
+                                      <p:to>
+                                        <p:strVal val="visible"/>
+                                      </p:to>
+                                    </p:set>
+                                    <p:animEffect transition="in" filter="fade">
+                                      <p:cBhvr>
+                                        <p:cTn id="13" dur="500"/>
+                                        <p:tgtEl>
+                                          <p:spTgt spid="29"/>
+                                        </p:tgtEl>
+                                      </p:cBhvr>
+                                    </p:animEffect>
+                                  </p:childTnLst>
+                                </p:cTn>
+                              </p:par>
+                              <p:par>
+                                <p:cTn id="14" presetID="10" presetClass="entr" presetSubtype="0" fill="hold" nodeType="withEffect">
+                                  <p:stCondLst>
+                                    <p:cond delay="900"/>
+                                  </p:stCondLst>
+                                  <p:childTnLst>
+                                    <p:set>
+                                      <p:cBhvr>
+                                        <p:cTn id="15" dur="1" fill="hold">
+                                          <p:stCondLst>
+                                            <p:cond delay="0"/>
+                                          </p:stCondLst>
+                                        </p:cTn>
+                                        <p:tgtEl>
+                                          <p:spTgt spid="31"/>
+                                        </p:tgtEl>
+                                        <p:attrNameLst>
+                                          <p:attrName>style.visibility</p:attrName>
+                                        </p:attrNameLst>
+                                      </p:cBhvr>
+                                      <p:to>
+                                        <p:strVal val="visible"/>
+                                      </p:to>
+                                    </p:set>
+                                    <p:animEffect transition="in" filter="fade">
+                                      <p:cBhvr>
+                                        <p:cTn id="16" dur="500"/>
+                                        <p:tgtEl>
+                                          <p:spTgt spid="31"/>
+                                        </p:tgtEl>
+                                      </p:cBhvr>
+                                    </p:animEffect>
+                                  </p:childTnLst>
+                                </p:cTn>
+                              </p:par>
+                              <p:par>
+                                <p:cTn id="17" presetID="10" presetClass="entr" presetSubtype="0" fill="hold" nodeType="withEffect">
+                                  <p:stCondLst>
+                                    <p:cond delay="1200"/>
+                                  </p:stCondLst>
+                                  <p:childTnLst>
+                                    <p:set>
+                                      <p:cBhvr>
+                                        <p:cTn id="18" dur="1" fill="hold">
+                                          <p:stCondLst>
+                                            <p:cond delay="0"/>
+                                          </p:stCondLst>
+                                        </p:cTn>
+                                        <p:tgtEl>
+                                          <p:spTgt spid="32"/>
+                                        </p:tgtEl>
+                                        <p:attrNameLst>
+                                          <p:attrName>style.visibility</p:attrName>
+                                        </p:attrNameLst>
+                                      </p:cBhvr>
+                                      <p:to>
+                                        <p:strVal val="visible"/>
+                                      </p:to>
+                                    </p:set>
+                                    <p:animEffect transition="in" filter="fade">
+                                      <p:cBhvr>
+                                        <p:cTn id="19" dur="500"/>
+                                        <p:tgtEl>
+                                          <p:spTgt spid="32"/>
+                                        </p:tgtEl>
+                                      </p:cBhvr>
+                                    </p:animEffect>
+                                  </p:childTnLst>
+                                </p:cTn>
+                              </p:par>
+                              <p:par>
+                                <p:cTn id="20" presetID="10" presetClass="entr" presetSubtype="0" fill="hold" nodeType="withEffect">
+                                  <p:stCondLst>
+                                    <p:cond delay="1500"/>
+                                  </p:stCondLst>
+                                  <p:childTnLst>
+                                    <p:set>
+                                      <p:cBhvr>
+                                        <p:cTn id="21" dur="1" fill="hold">
+                                          <p:stCondLst>
+                                            <p:cond delay="0"/>
+                                          </p:stCondLst>
+                                        </p:cTn>
+                                        <p:tgtEl>
+                                          <p:spTgt spid="33"/>
+                                        </p:tgtEl>
+                                        <p:attrNameLst>
+                                          <p:attrName>style.visibility</p:attrName>
+                                        </p:attrNameLst>
+                                      </p:cBhvr>
+                                      <p:to>
+                                        <p:strVal val="visible"/>
+                                      </p:to>
+                                    </p:set>
+                                    <p:animEffect transition="in" filter="fade">
+                                      <p:cBhvr>
+                                        <p:cTn id="22" dur="500"/>
+                                        <p:tgtEl>
+                                          <p:spTgt spid="33"/>
+                                        </p:tgtEl>
+                                      </p:cBhvr>
+                                    </p:animEffect>
+                                  </p:childTnLst>
+                                </p:cTn>
+                              </p:par>
+                            </p:childTnLst>
+                          </p:cTn>
+                        </p:par>
+                      </p:childTnLst>
+                    </p:cTn>
+                  </p:par>
+                </p:childTnLst>
+              </p:cTn>
+              <p:prevCondLst>
+                <p:cond evt="onPrev" delay="0">
+                  <p:tgtEl>
+                    <p:sldTgt/>
+                  </p:tgtEl>
+                </p:cond>
+              </p:prevCondLst>
+              <p:nextCondLst>
+                <p:cond evt="onNext" delay="0">
+                  <p:tgtEl>
+                    <p:sldTgt/>
+                  </p:tgtEl>
+                </p:cond>
+              </p:nextCondLst>
+            </p:seq>
+          </p:childTnLst>
+        </p:cTn>
+      </p:par>
+    </p:tnLst>
+  </p:timing>
 </p:sld>
 </file>
 
@@ -36870,6 +41483,279 @@
   <p:clrMapOvr>
     <a:masterClrMapping/>
   </p:clrMapOvr>
+  <mc:AlternateContent xmlns:mc="http://schemas.openxmlformats.org/markup-compatibility/2006">
+    <mc:Choice xmlns:p14="http://schemas.microsoft.com/office/powerpoint/2010/main" Requires="p14">
+      <p:transition spd="med" p14:dur="700">
+        <p:fade/>
+      </p:transition>
+    </mc:Choice>
+    <mc:Fallback>
+      <p:transition spd="med">
+        <p:fade/>
+      </p:transition>
+    </mc:Fallback>
+  </mc:AlternateContent>
+  <p:timing>
+    <p:tnLst>
+      <p:par>
+        <p:cTn id="1" dur="indefinite" restart="never" nodeType="tmRoot">
+          <p:childTnLst>
+            <p:seq concurrent="1" nextAc="seek">
+              <p:cTn id="2" dur="indefinite" nodeType="mainSeq">
+                <p:childTnLst>
+                  <p:par>
+                    <p:cTn id="3" fill="hold">
+                      <p:stCondLst>
+                        <p:cond delay="indefinite"/>
+                        <p:cond evt="onBegin" delay="0">
+                          <p:tn val="2"/>
+                        </p:cond>
+                      </p:stCondLst>
+                      <p:childTnLst>
+                        <p:par>
+                          <p:cTn id="4" fill="hold">
+                            <p:stCondLst>
+                              <p:cond delay="0"/>
+                            </p:stCondLst>
+                            <p:childTnLst>
+                              <p:par>
+                                <p:cTn id="5" presetID="10" presetClass="entr" presetSubtype="0" fill="hold" nodeType="afterEffect">
+                                  <p:stCondLst>
+                                    <p:cond delay="0"/>
+                                  </p:stCondLst>
+                                  <p:childTnLst>
+                                    <p:set>
+                                      <p:cBhvr>
+                                        <p:cTn id="6" dur="1" fill="hold">
+                                          <p:stCondLst>
+                                            <p:cond delay="0"/>
+                                          </p:stCondLst>
+                                        </p:cTn>
+                                        <p:tgtEl>
+                                          <p:spTgt spid="4"/>
+                                        </p:tgtEl>
+                                        <p:attrNameLst>
+                                          <p:attrName>style.visibility</p:attrName>
+                                        </p:attrNameLst>
+                                      </p:cBhvr>
+                                      <p:to>
+                                        <p:strVal val="visible"/>
+                                      </p:to>
+                                    </p:set>
+                                    <p:animEffect transition="in" filter="fade">
+                                      <p:cBhvr>
+                                        <p:cTn id="7" dur="500"/>
+                                        <p:tgtEl>
+                                          <p:spTgt spid="4"/>
+                                        </p:tgtEl>
+                                      </p:cBhvr>
+                                    </p:animEffect>
+                                  </p:childTnLst>
+                                </p:cTn>
+                              </p:par>
+                              <p:par>
+                                <p:cTn id="8" presetID="10" presetClass="entr" presetSubtype="0" fill="hold" nodeType="withEffect">
+                                  <p:stCondLst>
+                                    <p:cond delay="300"/>
+                                  </p:stCondLst>
+                                  <p:childTnLst>
+                                    <p:set>
+                                      <p:cBhvr>
+                                        <p:cTn id="9" dur="1" fill="hold">
+                                          <p:stCondLst>
+                                            <p:cond delay="0"/>
+                                          </p:stCondLst>
+                                        </p:cTn>
+                                        <p:tgtEl>
+                                          <p:spTgt spid="6"/>
+                                        </p:tgtEl>
+                                        <p:attrNameLst>
+                                          <p:attrName>style.visibility</p:attrName>
+                                        </p:attrNameLst>
+                                      </p:cBhvr>
+                                      <p:to>
+                                        <p:strVal val="visible"/>
+                                      </p:to>
+                                    </p:set>
+                                    <p:animEffect transition="in" filter="fade">
+                                      <p:cBhvr>
+                                        <p:cTn id="10" dur="500"/>
+                                        <p:tgtEl>
+                                          <p:spTgt spid="6"/>
+                                        </p:tgtEl>
+                                      </p:cBhvr>
+                                    </p:animEffect>
+                                  </p:childTnLst>
+                                </p:cTn>
+                              </p:par>
+                              <p:par>
+                                <p:cTn id="11" presetID="10" presetClass="entr" presetSubtype="0" fill="hold" nodeType="withEffect">
+                                  <p:stCondLst>
+                                    <p:cond delay="600"/>
+                                  </p:stCondLst>
+                                  <p:childTnLst>
+                                    <p:set>
+                                      <p:cBhvr>
+                                        <p:cTn id="12" dur="1" fill="hold">
+                                          <p:stCondLst>
+                                            <p:cond delay="0"/>
+                                          </p:stCondLst>
+                                        </p:cTn>
+                                        <p:tgtEl>
+                                          <p:spTgt spid="32"/>
+                                        </p:tgtEl>
+                                        <p:attrNameLst>
+                                          <p:attrName>style.visibility</p:attrName>
+                                        </p:attrNameLst>
+                                      </p:cBhvr>
+                                      <p:to>
+                                        <p:strVal val="visible"/>
+                                      </p:to>
+                                    </p:set>
+                                    <p:animEffect transition="in" filter="fade">
+                                      <p:cBhvr>
+                                        <p:cTn id="13" dur="500"/>
+                                        <p:tgtEl>
+                                          <p:spTgt spid="32"/>
+                                        </p:tgtEl>
+                                      </p:cBhvr>
+                                    </p:animEffect>
+                                  </p:childTnLst>
+                                </p:cTn>
+                              </p:par>
+                              <p:par>
+                                <p:cTn id="14" presetID="10" presetClass="entr" presetSubtype="0" fill="hold" nodeType="withEffect">
+                                  <p:stCondLst>
+                                    <p:cond delay="900"/>
+                                  </p:stCondLst>
+                                  <p:childTnLst>
+                                    <p:set>
+                                      <p:cBhvr>
+                                        <p:cTn id="15" dur="1" fill="hold">
+                                          <p:stCondLst>
+                                            <p:cond delay="0"/>
+                                          </p:stCondLst>
+                                        </p:cTn>
+                                        <p:tgtEl>
+                                          <p:spTgt spid="34"/>
+                                        </p:tgtEl>
+                                        <p:attrNameLst>
+                                          <p:attrName>style.visibility</p:attrName>
+                                        </p:attrNameLst>
+                                      </p:cBhvr>
+                                      <p:to>
+                                        <p:strVal val="visible"/>
+                                      </p:to>
+                                    </p:set>
+                                    <p:animEffect transition="in" filter="fade">
+                                      <p:cBhvr>
+                                        <p:cTn id="16" dur="500"/>
+                                        <p:tgtEl>
+                                          <p:spTgt spid="34"/>
+                                        </p:tgtEl>
+                                      </p:cBhvr>
+                                    </p:animEffect>
+                                  </p:childTnLst>
+                                </p:cTn>
+                              </p:par>
+                              <p:par>
+                                <p:cTn id="17" presetID="10" presetClass="entr" presetSubtype="0" fill="hold" nodeType="withEffect">
+                                  <p:stCondLst>
+                                    <p:cond delay="1200"/>
+                                  </p:stCondLst>
+                                  <p:childTnLst>
+                                    <p:set>
+                                      <p:cBhvr>
+                                        <p:cTn id="18" dur="1" fill="hold">
+                                          <p:stCondLst>
+                                            <p:cond delay="0"/>
+                                          </p:stCondLst>
+                                        </p:cTn>
+                                        <p:tgtEl>
+                                          <p:spTgt spid="35"/>
+                                        </p:tgtEl>
+                                        <p:attrNameLst>
+                                          <p:attrName>style.visibility</p:attrName>
+                                        </p:attrNameLst>
+                                      </p:cBhvr>
+                                      <p:to>
+                                        <p:strVal val="visible"/>
+                                      </p:to>
+                                    </p:set>
+                                    <p:animEffect transition="in" filter="fade">
+                                      <p:cBhvr>
+                                        <p:cTn id="19" dur="500"/>
+                                        <p:tgtEl>
+                                          <p:spTgt spid="35"/>
+                                        </p:tgtEl>
+                                      </p:cBhvr>
+                                    </p:animEffect>
+                                  </p:childTnLst>
+                                </p:cTn>
+                              </p:par>
+                              <p:par>
+                                <p:cTn id="20" presetID="10" presetClass="entr" presetSubtype="0" fill="hold" nodeType="withEffect">
+                                  <p:stCondLst>
+                                    <p:cond delay="1500"/>
+                                  </p:stCondLst>
+                                  <p:childTnLst>
+                                    <p:set>
+                                      <p:cBhvr>
+                                        <p:cTn id="21" dur="1" fill="hold">
+                                          <p:stCondLst>
+                                            <p:cond delay="0"/>
+                                          </p:stCondLst>
+                                        </p:cTn>
+                                        <p:tgtEl>
+                                          <p:spTgt spid="36"/>
+                                        </p:tgtEl>
+                                        <p:attrNameLst>
+                                          <p:attrName>style.visibility</p:attrName>
+                                        </p:attrNameLst>
+                                      </p:cBhvr>
+                                      <p:to>
+                                        <p:strVal val="visible"/>
+                                      </p:to>
+                                    </p:set>
+                                    <p:animEffect transition="in" filter="fade">
+                                      <p:cBhvr>
+                                        <p:cTn id="22" dur="500"/>
+                                        <p:tgtEl>
+                                          <p:spTgt spid="36"/>
+                                        </p:tgtEl>
+                                      </p:cBhvr>
+                                    </p:animEffect>
+                                  </p:childTnLst>
+                                </p:cTn>
+                              </p:par>
+                            </p:childTnLst>
+                          </p:cTn>
+                        </p:par>
+                      </p:childTnLst>
+                    </p:cTn>
+                  </p:par>
+                </p:childTnLst>
+              </p:cTn>
+              <p:prevCondLst>
+                <p:cond evt="onPrev" delay="0">
+                  <p:tgtEl>
+                    <p:sldTgt/>
+                  </p:tgtEl>
+                </p:cond>
+              </p:prevCondLst>
+              <p:nextCondLst>
+                <p:cond evt="onNext" delay="0">
+                  <p:tgtEl>
+                    <p:sldTgt/>
+                  </p:tgtEl>
+                </p:cond>
+              </p:nextCondLst>
+            </p:seq>
+          </p:childTnLst>
+        </p:cTn>
+      </p:par>
+    </p:tnLst>
+  </p:timing>
 </p:sld>
 </file>
 
@@ -37789,6 +42675,209 @@
   <p:clrMapOvr>
     <a:masterClrMapping/>
   </p:clrMapOvr>
+  <mc:AlternateContent xmlns:mc="http://schemas.openxmlformats.org/markup-compatibility/2006">
+    <mc:Choice xmlns:p14="http://schemas.microsoft.com/office/powerpoint/2010/main" Requires="p14">
+      <p:transition spd="med" p14:dur="700">
+        <p:fade/>
+      </p:transition>
+    </mc:Choice>
+    <mc:Fallback>
+      <p:transition spd="med">
+        <p:fade/>
+      </p:transition>
+    </mc:Fallback>
+  </mc:AlternateContent>
+  <p:timing>
+    <p:tnLst>
+      <p:par>
+        <p:cTn id="1" dur="indefinite" restart="never" nodeType="tmRoot">
+          <p:childTnLst>
+            <p:seq concurrent="1" nextAc="seek">
+              <p:cTn id="2" dur="indefinite" nodeType="mainSeq">
+                <p:childTnLst>
+                  <p:par>
+                    <p:cTn id="3" fill="hold">
+                      <p:stCondLst>
+                        <p:cond delay="indefinite"/>
+                        <p:cond evt="onBegin" delay="0">
+                          <p:tn val="2"/>
+                        </p:cond>
+                      </p:stCondLst>
+                      <p:childTnLst>
+                        <p:par>
+                          <p:cTn id="4" fill="hold">
+                            <p:stCondLst>
+                              <p:cond delay="0"/>
+                            </p:stCondLst>
+                            <p:childTnLst>
+                              <p:par>
+                                <p:cTn id="5" presetID="10" presetClass="entr" presetSubtype="0" fill="hold" nodeType="afterEffect">
+                                  <p:stCondLst>
+                                    <p:cond delay="0"/>
+                                  </p:stCondLst>
+                                  <p:childTnLst>
+                                    <p:set>
+                                      <p:cBhvr>
+                                        <p:cTn id="6" dur="1" fill="hold">
+                                          <p:stCondLst>
+                                            <p:cond delay="0"/>
+                                          </p:stCondLst>
+                                        </p:cTn>
+                                        <p:tgtEl>
+                                          <p:spTgt spid="4"/>
+                                        </p:tgtEl>
+                                        <p:attrNameLst>
+                                          <p:attrName>style.visibility</p:attrName>
+                                        </p:attrNameLst>
+                                      </p:cBhvr>
+                                      <p:to>
+                                        <p:strVal val="visible"/>
+                                      </p:to>
+                                    </p:set>
+                                    <p:animEffect transition="in" filter="fade">
+                                      <p:cBhvr>
+                                        <p:cTn id="7" dur="500"/>
+                                        <p:tgtEl>
+                                          <p:spTgt spid="4"/>
+                                        </p:tgtEl>
+                                      </p:cBhvr>
+                                    </p:animEffect>
+                                  </p:childTnLst>
+                                </p:cTn>
+                              </p:par>
+                              <p:par>
+                                <p:cTn id="8" presetID="10" presetClass="entr" presetSubtype="0" fill="hold" nodeType="withEffect">
+                                  <p:stCondLst>
+                                    <p:cond delay="300"/>
+                                  </p:stCondLst>
+                                  <p:childTnLst>
+                                    <p:set>
+                                      <p:cBhvr>
+                                        <p:cTn id="9" dur="1" fill="hold">
+                                          <p:stCondLst>
+                                            <p:cond delay="0"/>
+                                          </p:stCondLst>
+                                        </p:cTn>
+                                        <p:tgtEl>
+                                          <p:spTgt spid="23"/>
+                                        </p:tgtEl>
+                                        <p:attrNameLst>
+                                          <p:attrName>style.visibility</p:attrName>
+                                        </p:attrNameLst>
+                                      </p:cBhvr>
+                                      <p:to>
+                                        <p:strVal val="visible"/>
+                                      </p:to>
+                                    </p:set>
+                                    <p:animEffect transition="in" filter="fade">
+                                      <p:cBhvr>
+                                        <p:cTn id="10" dur="500"/>
+                                        <p:tgtEl>
+                                          <p:spTgt spid="23"/>
+                                        </p:tgtEl>
+                                      </p:cBhvr>
+                                    </p:animEffect>
+                                  </p:childTnLst>
+                                </p:cTn>
+                              </p:par>
+                              <p:par>
+                                <p:cTn id="11" presetID="10" presetClass="entr" presetSubtype="0" fill="hold" nodeType="withEffect">
+                                  <p:stCondLst>
+                                    <p:cond delay="600"/>
+                                  </p:stCondLst>
+                                  <p:childTnLst>
+                                    <p:set>
+                                      <p:cBhvr>
+                                        <p:cTn id="12" dur="1" fill="hold">
+                                          <p:stCondLst>
+                                            <p:cond delay="0"/>
+                                          </p:stCondLst>
+                                        </p:cTn>
+                                        <p:tgtEl>
+                                          <p:spTgt spid="24"/>
+                                        </p:tgtEl>
+                                        <p:attrNameLst>
+                                          <p:attrName>style.visibility</p:attrName>
+                                        </p:attrNameLst>
+                                      </p:cBhvr>
+                                      <p:to>
+                                        <p:strVal val="visible"/>
+                                      </p:to>
+                                    </p:set>
+                                    <p:animEffect transition="in" filter="fade">
+                                      <p:cBhvr>
+                                        <p:cTn id="13" dur="500"/>
+                                        <p:tgtEl>
+                                          <p:spTgt spid="24"/>
+                                        </p:tgtEl>
+                                      </p:cBhvr>
+                                    </p:animEffect>
+                                  </p:childTnLst>
+                                </p:cTn>
+                              </p:par>
+                              <p:par>
+                                <p:cTn id="14" presetID="10" presetClass="entr" presetSubtype="0" fill="hold" nodeType="withEffect">
+                                  <p:stCondLst>
+                                    <p:cond delay="900"/>
+                                  </p:stCondLst>
+                                  <p:childTnLst>
+                                    <p:set>
+                                      <p:cBhvr>
+                                        <p:cTn id="15" dur="1" fill="hold">
+                                          <p:stCondLst>
+                                            <p:cond delay="0"/>
+                                          </p:stCondLst>
+                                        </p:cTn>
+                                        <p:tgtEl>
+                                          <p:spTgt spid="25"/>
+                                        </p:tgtEl>
+                                        <p:attrNameLst>
+                                          <p:attrName>style.visibility</p:attrName>
+                                        </p:attrNameLst>
+                                      </p:cBhvr>
+                                      <p:to>
+                                        <p:strVal val="visible"/>
+                                      </p:to>
+                                    </p:set>
+                                    <p:animEffect transition="in" filter="fade">
+                                      <p:cBhvr>
+                                        <p:cTn id="16" dur="500"/>
+                                        <p:tgtEl>
+                                          <p:spTgt spid="25"/>
+                                        </p:tgtEl>
+                                      </p:cBhvr>
+                                    </p:animEffect>
+                                  </p:childTnLst>
+                                </p:cTn>
+                              </p:par>
+                            </p:childTnLst>
+                          </p:cTn>
+                        </p:par>
+                      </p:childTnLst>
+                    </p:cTn>
+                  </p:par>
+                </p:childTnLst>
+              </p:cTn>
+              <p:prevCondLst>
+                <p:cond evt="onPrev" delay="0">
+                  <p:tgtEl>
+                    <p:sldTgt/>
+                  </p:tgtEl>
+                </p:cond>
+              </p:prevCondLst>
+              <p:nextCondLst>
+                <p:cond evt="onNext" delay="0">
+                  <p:tgtEl>
+                    <p:sldTgt/>
+                  </p:tgtEl>
+                </p:cond>
+              </p:nextCondLst>
+            </p:seq>
+          </p:childTnLst>
+        </p:cTn>
+      </p:par>
+    </p:tnLst>
+  </p:timing>
 </p:sld>
 </file>
 
@@ -40535,6 +45624,209 @@
   <p:clrMapOvr>
     <a:masterClrMapping/>
   </p:clrMapOvr>
+  <mc:AlternateContent xmlns:mc="http://schemas.openxmlformats.org/markup-compatibility/2006">
+    <mc:Choice xmlns:p14="http://schemas.microsoft.com/office/powerpoint/2010/main" Requires="p14">
+      <p:transition spd="med" p14:dur="700">
+        <p:fade/>
+      </p:transition>
+    </mc:Choice>
+    <mc:Fallback>
+      <p:transition spd="med">
+        <p:fade/>
+      </p:transition>
+    </mc:Fallback>
+  </mc:AlternateContent>
+  <p:timing>
+    <p:tnLst>
+      <p:par>
+        <p:cTn id="1" dur="indefinite" restart="never" nodeType="tmRoot">
+          <p:childTnLst>
+            <p:seq concurrent="1" nextAc="seek">
+              <p:cTn id="2" dur="indefinite" nodeType="mainSeq">
+                <p:childTnLst>
+                  <p:par>
+                    <p:cTn id="3" fill="hold">
+                      <p:stCondLst>
+                        <p:cond delay="indefinite"/>
+                        <p:cond evt="onBegin" delay="0">
+                          <p:tn val="2"/>
+                        </p:cond>
+                      </p:stCondLst>
+                      <p:childTnLst>
+                        <p:par>
+                          <p:cTn id="4" fill="hold">
+                            <p:stCondLst>
+                              <p:cond delay="0"/>
+                            </p:stCondLst>
+                            <p:childTnLst>
+                              <p:par>
+                                <p:cTn id="5" presetID="10" presetClass="entr" presetSubtype="0" fill="hold" nodeType="afterEffect">
+                                  <p:stCondLst>
+                                    <p:cond delay="0"/>
+                                  </p:stCondLst>
+                                  <p:childTnLst>
+                                    <p:set>
+                                      <p:cBhvr>
+                                        <p:cTn id="6" dur="1" fill="hold">
+                                          <p:stCondLst>
+                                            <p:cond delay="0"/>
+                                          </p:stCondLst>
+                                        </p:cTn>
+                                        <p:tgtEl>
+                                          <p:spTgt spid="4"/>
+                                        </p:tgtEl>
+                                        <p:attrNameLst>
+                                          <p:attrName>style.visibility</p:attrName>
+                                        </p:attrNameLst>
+                                      </p:cBhvr>
+                                      <p:to>
+                                        <p:strVal val="visible"/>
+                                      </p:to>
+                                    </p:set>
+                                    <p:animEffect transition="in" filter="fade">
+                                      <p:cBhvr>
+                                        <p:cTn id="7" dur="500"/>
+                                        <p:tgtEl>
+                                          <p:spTgt spid="4"/>
+                                        </p:tgtEl>
+                                      </p:cBhvr>
+                                    </p:animEffect>
+                                  </p:childTnLst>
+                                </p:cTn>
+                              </p:par>
+                              <p:par>
+                                <p:cTn id="8" presetID="10" presetClass="entr" presetSubtype="0" fill="hold" nodeType="withEffect">
+                                  <p:stCondLst>
+                                    <p:cond delay="300"/>
+                                  </p:stCondLst>
+                                  <p:childTnLst>
+                                    <p:set>
+                                      <p:cBhvr>
+                                        <p:cTn id="9" dur="1" fill="hold">
+                                          <p:stCondLst>
+                                            <p:cond delay="0"/>
+                                          </p:stCondLst>
+                                        </p:cTn>
+                                        <p:tgtEl>
+                                          <p:spTgt spid="86"/>
+                                        </p:tgtEl>
+                                        <p:attrNameLst>
+                                          <p:attrName>style.visibility</p:attrName>
+                                        </p:attrNameLst>
+                                      </p:cBhvr>
+                                      <p:to>
+                                        <p:strVal val="visible"/>
+                                      </p:to>
+                                    </p:set>
+                                    <p:animEffect transition="in" filter="fade">
+                                      <p:cBhvr>
+                                        <p:cTn id="10" dur="500"/>
+                                        <p:tgtEl>
+                                          <p:spTgt spid="86"/>
+                                        </p:tgtEl>
+                                      </p:cBhvr>
+                                    </p:animEffect>
+                                  </p:childTnLst>
+                                </p:cTn>
+                              </p:par>
+                              <p:par>
+                                <p:cTn id="11" presetID="10" presetClass="entr" presetSubtype="0" fill="hold" nodeType="withEffect">
+                                  <p:stCondLst>
+                                    <p:cond delay="600"/>
+                                  </p:stCondLst>
+                                  <p:childTnLst>
+                                    <p:set>
+                                      <p:cBhvr>
+                                        <p:cTn id="12" dur="1" fill="hold">
+                                          <p:stCondLst>
+                                            <p:cond delay="0"/>
+                                          </p:stCondLst>
+                                        </p:cTn>
+                                        <p:tgtEl>
+                                          <p:spTgt spid="87"/>
+                                        </p:tgtEl>
+                                        <p:attrNameLst>
+                                          <p:attrName>style.visibility</p:attrName>
+                                        </p:attrNameLst>
+                                      </p:cBhvr>
+                                      <p:to>
+                                        <p:strVal val="visible"/>
+                                      </p:to>
+                                    </p:set>
+                                    <p:animEffect transition="in" filter="fade">
+                                      <p:cBhvr>
+                                        <p:cTn id="13" dur="500"/>
+                                        <p:tgtEl>
+                                          <p:spTgt spid="87"/>
+                                        </p:tgtEl>
+                                      </p:cBhvr>
+                                    </p:animEffect>
+                                  </p:childTnLst>
+                                </p:cTn>
+                              </p:par>
+                              <p:par>
+                                <p:cTn id="14" presetID="10" presetClass="entr" presetSubtype="0" fill="hold" nodeType="withEffect">
+                                  <p:stCondLst>
+                                    <p:cond delay="900"/>
+                                  </p:stCondLst>
+                                  <p:childTnLst>
+                                    <p:set>
+                                      <p:cBhvr>
+                                        <p:cTn id="15" dur="1" fill="hold">
+                                          <p:stCondLst>
+                                            <p:cond delay="0"/>
+                                          </p:stCondLst>
+                                        </p:cTn>
+                                        <p:tgtEl>
+                                          <p:spTgt spid="88"/>
+                                        </p:tgtEl>
+                                        <p:attrNameLst>
+                                          <p:attrName>style.visibility</p:attrName>
+                                        </p:attrNameLst>
+                                      </p:cBhvr>
+                                      <p:to>
+                                        <p:strVal val="visible"/>
+                                      </p:to>
+                                    </p:set>
+                                    <p:animEffect transition="in" filter="fade">
+                                      <p:cBhvr>
+                                        <p:cTn id="16" dur="500"/>
+                                        <p:tgtEl>
+                                          <p:spTgt spid="88"/>
+                                        </p:tgtEl>
+                                      </p:cBhvr>
+                                    </p:animEffect>
+                                  </p:childTnLst>
+                                </p:cTn>
+                              </p:par>
+                            </p:childTnLst>
+                          </p:cTn>
+                        </p:par>
+                      </p:childTnLst>
+                    </p:cTn>
+                  </p:par>
+                </p:childTnLst>
+              </p:cTn>
+              <p:prevCondLst>
+                <p:cond evt="onPrev" delay="0">
+                  <p:tgtEl>
+                    <p:sldTgt/>
+                  </p:tgtEl>
+                </p:cond>
+              </p:prevCondLst>
+              <p:nextCondLst>
+                <p:cond evt="onNext" delay="0">
+                  <p:tgtEl>
+                    <p:sldTgt/>
+                  </p:tgtEl>
+                </p:cond>
+              </p:nextCondLst>
+            </p:seq>
+          </p:childTnLst>
+        </p:cTn>
+      </p:par>
+    </p:tnLst>
+  </p:timing>
 </p:sld>
 </file>
 
